--- a/_slides/slides_de_cours/01. INI_slides.pptx
+++ b/_slides/slides_de_cours/01. INI_slides.pptx
@@ -4963,7 +4963,7 @@
             </a:r>
             <a:r>
               <a:rPr dirty="0"/>
-              <a:t> 36 </a:t>
+              <a:t> 37 </a:t>
             </a:r>
             <a:r>
               <a:rPr dirty="0" err="1"/>

--- a/_slides/slides_de_cours/01. INI_slides.pptx
+++ b/_slides/slides_de_cours/01. INI_slides.pptx
@@ -5,10 +5,10 @@
     <p:sldMasterId id="2147483660" r:id="rId1"/>
   </p:sldMasterIdLst>
   <p:notesMasterIdLst>
-    <p:notesMasterId r:id="rId29"/>
+    <p:notesMasterId r:id="rId30"/>
   </p:notesMasterIdLst>
   <p:handoutMasterIdLst>
-    <p:handoutMasterId r:id="rId30"/>
+    <p:handoutMasterId r:id="rId31"/>
   </p:handoutMasterIdLst>
   <p:sldIdLst>
     <p:sldId id="256" r:id="rId2"/>
@@ -28,16 +28,17 @@
     <p:sldId id="563" r:id="rId16"/>
     <p:sldId id="564" r:id="rId17"/>
     <p:sldId id="565" r:id="rId18"/>
-    <p:sldId id="566" r:id="rId19"/>
-    <p:sldId id="487" r:id="rId20"/>
-    <p:sldId id="567" r:id="rId21"/>
-    <p:sldId id="575" r:id="rId22"/>
-    <p:sldId id="569" r:id="rId23"/>
-    <p:sldId id="570" r:id="rId24"/>
-    <p:sldId id="571" r:id="rId25"/>
-    <p:sldId id="568" r:id="rId26"/>
-    <p:sldId id="572" r:id="rId27"/>
-    <p:sldId id="573" r:id="rId28"/>
+    <p:sldId id="577" r:id="rId19"/>
+    <p:sldId id="566" r:id="rId20"/>
+    <p:sldId id="487" r:id="rId21"/>
+    <p:sldId id="567" r:id="rId22"/>
+    <p:sldId id="575" r:id="rId23"/>
+    <p:sldId id="569" r:id="rId24"/>
+    <p:sldId id="570" r:id="rId25"/>
+    <p:sldId id="571" r:id="rId26"/>
+    <p:sldId id="568" r:id="rId27"/>
+    <p:sldId id="572" r:id="rId28"/>
+    <p:sldId id="573" r:id="rId29"/>
   </p:sldIdLst>
   <p:sldSz cx="12192000" cy="6858000"/>
   <p:notesSz cx="6858000" cy="9144000"/>
@@ -166,6 +167,7 @@
             <p14:sldId id="563"/>
             <p14:sldId id="564"/>
             <p14:sldId id="565"/>
+            <p14:sldId id="577"/>
             <p14:sldId id="566"/>
           </p14:sldIdLst>
         </p14:section>
@@ -288,7 +290,7 @@
           <a:p>
             <a:fld id="{19626FB5-9412-C54B-AA2C-289AC0CE5DB6}" type="datetimeFigureOut">
               <a:rPr lang="en-GB" smtClean="0"/>
-              <a:t>22/10/2026</a:t>
+              <a:t>24/10/2026</a:t>
             </a:fld>
             <a:endParaRPr lang="en-GB"/>
           </a:p>
@@ -465,7 +467,7 @@
           <a:p>
             <a:fld id="{B1FC913C-8767-6A46-ABE4-5FB13F57A51F}" type="datetimeFigureOut">
               <a:rPr lang="fr-FR" smtClean="0"/>
-              <a:t>22/10/2026</a:t>
+              <a:t>24/10/2026</a:t>
             </a:fld>
             <a:endParaRPr lang="fr-FR"/>
           </a:p>
@@ -2929,8 +2931,17 @@
           <a:lstStyle/>
           <a:p>
             <a:r>
-              <a:rPr lang="fr-BE" dirty="0"/>
-              <a:t>Les slides accompagnent l'explication orale. Le support de cours reprend chaque notion en prose, avec le code formaté. Un seul document couvre l'ensemble des modules : c'est lui qu'il faut relire entre les séances.</a:t>
+              <a:t>Les tests de module sont sur Moodle, un par section : huit questions tirées au hasard parmi quinze, réussi à 6 sur 8, tentatives illimitées. Après chaque réponse, l'étudiant voit si elle est juste et, sinon, la section du support à revoir.</a:t>
+            </a:r>
+          </a:p>
+          <a:p>
+            <a:r>
+              <a:t>Chaque test réussi donne un badge ; quatre badges d'étape (les fondations, l'architecte, le robuste, l'expert) et un badge final, « Java, de bout en bout », marquent le parcours. Un premier badge, « Pied à l'étrier », accueille ceux qui ont téléchargé le projet de départ.</a:t>
+            </a:r>
+          </a:p>
+          <a:p>
+            <a:r>
+              <a:t>Insister sur le sens : les badges ne comptent pas dans la note. Ce sont des repères, pour voir où l'on en est, et un encouragement à son rythme.</a:t>
             </a:r>
           </a:p>
         </p:txBody>
@@ -3001,7 +3012,7 @@
           <a:p>
             <a:r>
               <a:rPr lang="fr-BE" dirty="0"/>
-              <a:t>À côté des fascicules et du support, quatre documents de référence vous accompagnent toute l'année. On ne les lit pas d'une traite, à part le mémento Exercices : on les ouvre quand un énoncé ou une slide y renvoie.</a:t>
+              <a:t>Les slides accompagnent l'explication orale. Le support de cours reprend chaque notion en prose, avec le code formaté. Un seul document couvre l'ensemble des modules : c'est lui qu'il faut relire entre les séances.</a:t>
             </a:r>
           </a:p>
         </p:txBody>
@@ -3071,344 +3082,8 @@
           <a:lstStyle/>
           <a:p>
             <a:r>
-              <a:rPr dirty="0"/>
-              <a:t>Quatre documents de </a:t>
-            </a:r>
-            <a:r>
-              <a:rPr dirty="0" err="1"/>
-              <a:t>référence</a:t>
-            </a:r>
-            <a:r>
-              <a:rPr dirty="0"/>
-              <a:t> </a:t>
-            </a:r>
-            <a:r>
-              <a:rPr dirty="0" err="1"/>
-              <a:t>accompagnent</a:t>
-            </a:r>
-            <a:r>
-              <a:rPr dirty="0"/>
-              <a:t> le </a:t>
-            </a:r>
-            <a:r>
-              <a:rPr dirty="0" err="1"/>
-              <a:t>cours</a:t>
-            </a:r>
-            <a:r>
-              <a:rPr dirty="0"/>
-              <a:t>. </a:t>
-            </a:r>
-            <a:r>
-              <a:rPr dirty="0" err="1"/>
-              <a:t>Ils</a:t>
-            </a:r>
-            <a:r>
-              <a:rPr dirty="0"/>
-              <a:t> </a:t>
-            </a:r>
-            <a:r>
-              <a:rPr dirty="0" err="1"/>
-              <a:t>sont</a:t>
-            </a:r>
-            <a:r>
-              <a:rPr dirty="0"/>
-              <a:t> sur Moodle, dans la section Documents.</a:t>
-            </a:r>
-          </a:p>
-          <a:p>
-            <a:r>
-              <a:rPr dirty="0"/>
-              <a:t>Le </a:t>
-            </a:r>
-            <a:r>
-              <a:rPr dirty="0" err="1"/>
-              <a:t>mémento</a:t>
-            </a:r>
-            <a:r>
-              <a:rPr dirty="0"/>
-              <a:t> </a:t>
-            </a:r>
-            <a:r>
-              <a:rPr dirty="0" err="1"/>
-              <a:t>Exercices</a:t>
-            </a:r>
-            <a:r>
-              <a:rPr dirty="0"/>
-              <a:t> </a:t>
-            </a:r>
-            <a:r>
-              <a:rPr dirty="0" err="1"/>
-              <a:t>rassemble</a:t>
-            </a:r>
-            <a:r>
-              <a:rPr dirty="0"/>
-              <a:t> </a:t>
-            </a:r>
-            <a:r>
-              <a:rPr dirty="0" err="1"/>
-              <a:t>ce</a:t>
-            </a:r>
-            <a:r>
-              <a:rPr dirty="0"/>
-              <a:t> qui est </a:t>
-            </a:r>
-            <a:r>
-              <a:rPr dirty="0" err="1"/>
-              <a:t>commun</a:t>
-            </a:r>
-            <a:r>
-              <a:rPr dirty="0"/>
-              <a:t> à </a:t>
-            </a:r>
-            <a:r>
-              <a:rPr dirty="0" err="1"/>
-              <a:t>tous</a:t>
-            </a:r>
-            <a:r>
-              <a:rPr dirty="0"/>
-              <a:t> les fascicules : comment lancer les tests, comment lire </a:t>
-            </a:r>
-            <a:r>
-              <a:rPr dirty="0" err="1"/>
-              <a:t>leur</a:t>
-            </a:r>
-            <a:r>
-              <a:rPr dirty="0"/>
-              <a:t> </a:t>
-            </a:r>
-            <a:r>
-              <a:rPr dirty="0" err="1"/>
-              <a:t>résultat</a:t>
-            </a:r>
-            <a:r>
-              <a:rPr dirty="0"/>
-              <a:t>, </a:t>
-            </a:r>
-            <a:r>
-              <a:rPr dirty="0" err="1"/>
-              <a:t>pourquoi</a:t>
-            </a:r>
-            <a:r>
-              <a:rPr dirty="0"/>
-              <a:t> </a:t>
-            </a:r>
-            <a:r>
-              <a:rPr dirty="0" err="1"/>
-              <a:t>garder</a:t>
-            </a:r>
-            <a:r>
-              <a:rPr dirty="0"/>
-              <a:t> un code qui compile. </a:t>
-            </a:r>
-            <a:r>
-              <a:rPr dirty="0" err="1"/>
-              <a:t>Lisez</a:t>
-            </a:r>
-            <a:r>
-              <a:rPr dirty="0"/>
-              <a:t>-le </a:t>
-            </a:r>
-            <a:r>
-              <a:rPr dirty="0" err="1"/>
-              <a:t>une</a:t>
-            </a:r>
-            <a:r>
-              <a:rPr dirty="0"/>
-              <a:t> </a:t>
-            </a:r>
-            <a:r>
-              <a:rPr dirty="0" err="1"/>
-              <a:t>fois</a:t>
-            </a:r>
-            <a:r>
-              <a:rPr dirty="0"/>
-              <a:t> </a:t>
-            </a:r>
-            <a:r>
-              <a:rPr dirty="0" err="1"/>
-              <a:t>en</a:t>
-            </a:r>
-            <a:r>
-              <a:rPr dirty="0"/>
-              <a:t> début d</a:t>
-            </a:r>
-            <a:r>
               <a:rPr lang="fr-BE" dirty="0"/>
-              <a:t>'</a:t>
-            </a:r>
-            <a:r>
-              <a:rPr dirty="0" err="1"/>
-              <a:t>année</a:t>
-            </a:r>
-            <a:r>
-              <a:rPr dirty="0"/>
-              <a:t>.</a:t>
-            </a:r>
-          </a:p>
-          <a:p>
-            <a:r>
-              <a:rPr dirty="0"/>
-              <a:t>Les trois </a:t>
-            </a:r>
-            <a:r>
-              <a:rPr dirty="0" err="1"/>
-              <a:t>autres</a:t>
-            </a:r>
-            <a:r>
-              <a:rPr dirty="0"/>
-              <a:t> </a:t>
-            </a:r>
-            <a:r>
-              <a:rPr dirty="0" err="1"/>
-              <a:t>sont</a:t>
-            </a:r>
-            <a:r>
-              <a:rPr dirty="0"/>
-              <a:t> </a:t>
-            </a:r>
-            <a:r>
-              <a:rPr dirty="0" err="1"/>
-              <a:t>découpés</a:t>
-            </a:r>
-            <a:r>
-              <a:rPr dirty="0"/>
-              <a:t> </a:t>
-            </a:r>
-            <a:r>
-              <a:rPr dirty="0" err="1"/>
-              <a:t>en</a:t>
-            </a:r>
-            <a:r>
-              <a:rPr dirty="0"/>
-              <a:t> sections </a:t>
-            </a:r>
-            <a:r>
-              <a:rPr dirty="0" err="1"/>
-              <a:t>courtes</a:t>
-            </a:r>
-            <a:r>
-              <a:rPr dirty="0"/>
-              <a:t>, </a:t>
-            </a:r>
-            <a:r>
-              <a:rPr dirty="0" err="1"/>
-              <a:t>numérotées</a:t>
-            </a:r>
-            <a:r>
-              <a:rPr dirty="0"/>
-              <a:t> et </a:t>
-            </a:r>
-            <a:r>
-              <a:rPr dirty="0" err="1"/>
-              <a:t>préfixées</a:t>
-            </a:r>
-            <a:r>
-              <a:rPr dirty="0"/>
-              <a:t> : </a:t>
-            </a:r>
-            <a:r>
-              <a:rPr dirty="0">
-                <a:latin typeface="Consolas"/>
-              </a:rPr>
-              <a:t>IDE</a:t>
-            </a:r>
-            <a:r>
-              <a:rPr dirty="0"/>
-              <a:t> et </a:t>
-            </a:r>
-            <a:r>
-              <a:rPr dirty="0">
-                <a:latin typeface="Consolas"/>
-              </a:rPr>
-              <a:t>ERR</a:t>
-            </a:r>
-            <a:r>
-              <a:rPr dirty="0"/>
-              <a:t> pour le guide IntelliJ, </a:t>
-            </a:r>
-            <a:r>
-              <a:rPr dirty="0">
-                <a:latin typeface="Consolas"/>
-              </a:rPr>
-              <a:t>TEC</a:t>
-            </a:r>
-            <a:r>
-              <a:rPr dirty="0"/>
-              <a:t> pour le </a:t>
-            </a:r>
-            <a:r>
-              <a:rPr dirty="0" err="1"/>
-              <a:t>mémento</a:t>
-            </a:r>
-            <a:r>
-              <a:rPr dirty="0"/>
-              <a:t> technique, </a:t>
-            </a:r>
-            <a:r>
-              <a:rPr dirty="0">
-                <a:latin typeface="Consolas"/>
-              </a:rPr>
-              <a:t>CC</a:t>
-            </a:r>
-            <a:r>
-              <a:rPr dirty="0"/>
-              <a:t> pour le </a:t>
-            </a:r>
-            <a:r>
-              <a:rPr dirty="0" err="1"/>
-              <a:t>mémento</a:t>
-            </a:r>
-            <a:r>
-              <a:rPr dirty="0"/>
-              <a:t> Clean Code. </a:t>
-            </a:r>
-            <a:r>
-              <a:rPr dirty="0" err="1"/>
-              <a:t>Leurs</a:t>
-            </a:r>
-            <a:r>
-              <a:rPr dirty="0"/>
-              <a:t> </a:t>
-            </a:r>
-            <a:r>
-              <a:rPr dirty="0" err="1"/>
-              <a:t>sommaires</a:t>
-            </a:r>
-            <a:r>
-              <a:rPr dirty="0"/>
-              <a:t> et </a:t>
-            </a:r>
-            <a:r>
-              <a:rPr dirty="0" err="1"/>
-              <a:t>leurs</a:t>
-            </a:r>
-            <a:r>
-              <a:rPr dirty="0"/>
-              <a:t> </a:t>
-            </a:r>
-            <a:r>
-              <a:rPr dirty="0" err="1"/>
-              <a:t>renvois</a:t>
-            </a:r>
-            <a:r>
-              <a:rPr dirty="0"/>
-              <a:t> internes </a:t>
-            </a:r>
-            <a:r>
-              <a:rPr dirty="0" err="1"/>
-              <a:t>sont</a:t>
-            </a:r>
-            <a:r>
-              <a:rPr dirty="0"/>
-              <a:t> </a:t>
-            </a:r>
-            <a:r>
-              <a:rPr dirty="0" err="1"/>
-              <a:t>cliquables</a:t>
-            </a:r>
-            <a:r>
-              <a:rPr dirty="0"/>
-              <a:t>.</a:t>
+              <a:t>À côté des fascicules et du support, quatre documents de référence vous accompagnent toute l'année. On ne les lit pas d'une traite, à part le mémento Exercices : on les ouvre quand un énoncé ou une slide y renvoie.</a:t>
             </a:r>
           </a:p>
         </p:txBody>
@@ -3666,6 +3341,52 @@
           <a:p>
             <a:r>
               <a:rPr dirty="0"/>
+              <a:t>Quatre documents de </a:t>
+            </a:r>
+            <a:r>
+              <a:rPr dirty="0" err="1"/>
+              <a:t>référence</a:t>
+            </a:r>
+            <a:r>
+              <a:rPr dirty="0"/>
+              <a:t> </a:t>
+            </a:r>
+            <a:r>
+              <a:rPr dirty="0" err="1"/>
+              <a:t>accompagnent</a:t>
+            </a:r>
+            <a:r>
+              <a:rPr dirty="0"/>
+              <a:t> le </a:t>
+            </a:r>
+            <a:r>
+              <a:rPr dirty="0" err="1"/>
+              <a:t>cours</a:t>
+            </a:r>
+            <a:r>
+              <a:rPr dirty="0"/>
+              <a:t>. </a:t>
+            </a:r>
+            <a:r>
+              <a:rPr dirty="0" err="1"/>
+              <a:t>Ils</a:t>
+            </a:r>
+            <a:r>
+              <a:rPr dirty="0"/>
+              <a:t> </a:t>
+            </a:r>
+            <a:r>
+              <a:rPr dirty="0" err="1"/>
+              <a:t>sont</a:t>
+            </a:r>
+            <a:r>
+              <a:rPr dirty="0"/>
+              <a:t> sur Moodle, dans la section Documents.</a:t>
+            </a:r>
+          </a:p>
+          <a:p>
+            <a:r>
+              <a:rPr dirty="0"/>
               <a:t>Le </a:t>
             </a:r>
             <a:r>
@@ -3698,15 +3419,15 @@
             </a:r>
             <a:r>
               <a:rPr dirty="0"/>
-              <a:t> qui </a:t>
-            </a:r>
-            <a:r>
-              <a:rPr dirty="0" err="1"/>
-              <a:t>vaut</a:t>
-            </a:r>
-            <a:r>
-              <a:rPr dirty="0"/>
-              <a:t> pour </a:t>
+              <a:t> qui est </a:t>
+            </a:r>
+            <a:r>
+              <a:rPr dirty="0" err="1"/>
+              <a:t>commun</a:t>
+            </a:r>
+            <a:r>
+              <a:rPr dirty="0"/>
+              <a:t> à </a:t>
             </a:r>
             <a:r>
               <a:rPr dirty="0" err="1"/>
@@ -3714,47 +3435,93 @@
             </a:r>
             <a:r>
               <a:rPr dirty="0"/>
-              <a:t> les fascicules, et </a:t>
-            </a:r>
-            <a:r>
-              <a:rPr dirty="0" err="1"/>
-              <a:t>qu</a:t>
+              <a:t> les fascicules : comment lancer les tests, comment lire </a:t>
+            </a:r>
+            <a:r>
+              <a:rPr dirty="0" err="1"/>
+              <a:t>leur</a:t>
+            </a:r>
+            <a:r>
+              <a:rPr dirty="0"/>
+              <a:t> </a:t>
+            </a:r>
+            <a:r>
+              <a:rPr dirty="0" err="1"/>
+              <a:t>résultat</a:t>
+            </a:r>
+            <a:r>
+              <a:rPr dirty="0"/>
+              <a:t>, </a:t>
+            </a:r>
+            <a:r>
+              <a:rPr dirty="0" err="1"/>
+              <a:t>pourquoi</a:t>
+            </a:r>
+            <a:r>
+              <a:rPr dirty="0"/>
+              <a:t> </a:t>
+            </a:r>
+            <a:r>
+              <a:rPr dirty="0" err="1"/>
+              <a:t>garder</a:t>
+            </a:r>
+            <a:r>
+              <a:rPr dirty="0"/>
+              <a:t> un code qui compile. </a:t>
+            </a:r>
+            <a:r>
+              <a:rPr dirty="0" err="1"/>
+              <a:t>Lisez</a:t>
+            </a:r>
+            <a:r>
+              <a:rPr dirty="0"/>
+              <a:t>-le </a:t>
+            </a:r>
+            <a:r>
+              <a:rPr dirty="0" err="1"/>
+              <a:t>une</a:t>
+            </a:r>
+            <a:r>
+              <a:rPr dirty="0"/>
+              <a:t> </a:t>
+            </a:r>
+            <a:r>
+              <a:rPr dirty="0" err="1"/>
+              <a:t>fois</a:t>
+            </a:r>
+            <a:r>
+              <a:rPr dirty="0"/>
+              <a:t> </a:t>
+            </a:r>
+            <a:r>
+              <a:rPr dirty="0" err="1"/>
+              <a:t>en</a:t>
+            </a:r>
+            <a:r>
+              <a:rPr dirty="0"/>
+              <a:t> début d</a:t>
             </a:r>
             <a:r>
               <a:rPr lang="fr-BE" dirty="0"/>
               <a:t>'</a:t>
             </a:r>
             <a:r>
-              <a:rPr dirty="0"/>
-              <a:t>il </a:t>
-            </a:r>
-            <a:r>
-              <a:rPr dirty="0" err="1"/>
-              <a:t>serait</a:t>
-            </a:r>
-            <a:r>
-              <a:rPr dirty="0"/>
-              <a:t> inutile de </a:t>
-            </a:r>
-            <a:r>
-              <a:rPr dirty="0" err="1"/>
-              <a:t>répéter</a:t>
-            </a:r>
-            <a:r>
-              <a:rPr dirty="0"/>
-              <a:t> dans chacun. </a:t>
-            </a:r>
-            <a:r>
-              <a:rPr dirty="0" err="1"/>
-              <a:t>Lisez</a:t>
-            </a:r>
-            <a:r>
-              <a:rPr dirty="0"/>
-              <a:t>-le </a:t>
-            </a:r>
-            <a:r>
-              <a:rPr dirty="0" err="1"/>
-              <a:t>une</a:t>
+              <a:rPr dirty="0" err="1"/>
+              <a:t>année</a:t>
+            </a:r>
+            <a:r>
+              <a:rPr dirty="0"/>
+              <a:t>.</a:t>
+            </a:r>
+          </a:p>
+          <a:p>
+            <a:r>
+              <a:rPr dirty="0"/>
+              <a:t>Les trois </a:t>
+            </a:r>
+            <a:r>
+              <a:rPr dirty="0" err="1"/>
+              <a:t>autres</a:t>
             </a:r>
             <a:r>
               <a:rPr dirty="0"/>
@@ -3762,7 +3529,7 @@
             </a:r>
             <a:r>
               <a:rPr dirty="0" err="1"/>
-              <a:t>fois</a:t>
+              <a:t>sont</a:t>
             </a:r>
             <a:r>
               <a:rPr dirty="0"/>
@@ -3770,49 +3537,39 @@
             </a:r>
             <a:r>
               <a:rPr dirty="0" err="1"/>
+              <a:t>découpés</a:t>
+            </a:r>
+            <a:r>
+              <a:rPr dirty="0"/>
+              <a:t> </a:t>
+            </a:r>
+            <a:r>
+              <a:rPr dirty="0" err="1"/>
               <a:t>en</a:t>
             </a:r>
             <a:r>
               <a:rPr dirty="0"/>
-              <a:t> début d</a:t>
-            </a:r>
-            <a:r>
-              <a:rPr lang="fr-BE" dirty="0"/>
-              <a:t>'</a:t>
-            </a:r>
-            <a:r>
-              <a:rPr dirty="0" err="1"/>
-              <a:t>année</a:t>
-            </a:r>
-            <a:r>
-              <a:rPr dirty="0"/>
-              <a:t>.</a:t>
-            </a:r>
-          </a:p>
-          <a:p>
-            <a:r>
-              <a:rPr dirty="0"/>
-              <a:t>Il </a:t>
-            </a:r>
-            <a:r>
-              <a:rPr dirty="0" err="1"/>
-              <a:t>explique</a:t>
-            </a:r>
-            <a:r>
-              <a:rPr dirty="0"/>
-              <a:t> d</a:t>
-            </a:r>
-            <a:r>
-              <a:rPr lang="fr-BE" dirty="0"/>
-              <a:t>'</a:t>
-            </a:r>
-            <a:r>
-              <a:rPr dirty="0"/>
-              <a:t>abord la </a:t>
-            </a:r>
-            <a:r>
-              <a:rPr dirty="0" err="1"/>
-              <a:t>numérotation</a:t>
+              <a:t> sections </a:t>
+            </a:r>
+            <a:r>
+              <a:rPr dirty="0" err="1"/>
+              <a:t>courtes</a:t>
+            </a:r>
+            <a:r>
+              <a:rPr dirty="0"/>
+              <a:t>, </a:t>
+            </a:r>
+            <a:r>
+              <a:rPr dirty="0" err="1"/>
+              <a:t>numérotées</a:t>
+            </a:r>
+            <a:r>
+              <a:rPr dirty="0"/>
+              <a:t> et </a:t>
+            </a:r>
+            <a:r>
+              <a:rPr dirty="0" err="1"/>
+              <a:t>préfixées</a:t>
             </a:r>
             <a:r>
               <a:rPr dirty="0"/>
@@ -3822,399 +3579,61 @@
               <a:rPr dirty="0">
                 <a:latin typeface="Consolas"/>
               </a:rPr>
-              <a:t>EXC.3</a:t>
-            </a:r>
-            <a:r>
-              <a:rPr dirty="0"/>
-              <a:t> est le </a:t>
-            </a:r>
-            <a:r>
-              <a:rPr dirty="0" err="1"/>
-              <a:t>troisième</a:t>
-            </a:r>
-            <a:r>
-              <a:rPr dirty="0"/>
-              <a:t> </a:t>
-            </a:r>
-            <a:r>
-              <a:rPr dirty="0" err="1"/>
-              <a:t>exercice</a:t>
-            </a:r>
-            <a:r>
-              <a:rPr dirty="0"/>
-              <a:t> du </a:t>
-            </a:r>
-            <a:r>
-              <a:rPr dirty="0" err="1"/>
-              <a:t>module</a:t>
-            </a:r>
-            <a:r>
-              <a:rPr dirty="0"/>
-              <a:t> Exceptions, quelle </a:t>
-            </a:r>
-            <a:r>
-              <a:rPr dirty="0" err="1"/>
-              <a:t>que</a:t>
-            </a:r>
-            <a:r>
-              <a:rPr dirty="0"/>
-              <a:t> soit la séance </a:t>
-            </a:r>
-            <a:r>
-              <a:rPr dirty="0" err="1"/>
-              <a:t>où</a:t>
-            </a:r>
-            <a:r>
-              <a:rPr dirty="0"/>
-              <a:t> il </a:t>
-            </a:r>
-            <a:r>
-              <a:rPr dirty="0" err="1"/>
-              <a:t>tombe</a:t>
-            </a:r>
-            <a:r>
-              <a:rPr dirty="0"/>
-              <a:t>. Un </a:t>
-            </a:r>
-            <a:r>
-              <a:rPr dirty="0" err="1"/>
-              <a:t>exercice</a:t>
-            </a:r>
-            <a:r>
-              <a:rPr dirty="0"/>
-              <a:t> garde </a:t>
-            </a:r>
-            <a:r>
-              <a:rPr dirty="0" err="1"/>
-              <a:t>donc</a:t>
-            </a:r>
-            <a:r>
-              <a:rPr dirty="0"/>
-              <a:t> son code </a:t>
-            </a:r>
-            <a:r>
-              <a:rPr dirty="0" err="1"/>
-              <a:t>même</a:t>
-            </a:r>
-            <a:r>
-              <a:rPr dirty="0"/>
-              <a:t> </a:t>
-            </a:r>
-            <a:r>
-              <a:rPr dirty="0" err="1"/>
-              <a:t>si</a:t>
-            </a:r>
-            <a:r>
-              <a:rPr dirty="0"/>
-              <a:t> le </a:t>
-            </a:r>
-            <a:r>
-              <a:rPr dirty="0" err="1"/>
-              <a:t>calendrier</a:t>
-            </a:r>
-            <a:r>
-              <a:rPr dirty="0"/>
-              <a:t> change.</a:t>
-            </a:r>
-          </a:p>
-          <a:p>
-            <a:r>
-              <a:rPr dirty="0"/>
-              <a:t>Il montre ensuite comment lancer les classes de test </a:t>
-            </a:r>
-            <a:r>
-              <a:rPr dirty="0" err="1"/>
-              <a:t>fournies</a:t>
-            </a:r>
-            <a:r>
-              <a:rPr dirty="0"/>
-              <a:t>, et comment lire </a:t>
-            </a:r>
-            <a:r>
-              <a:rPr dirty="0" err="1"/>
-              <a:t>leur</a:t>
-            </a:r>
-            <a:r>
-              <a:rPr dirty="0"/>
-              <a:t> </a:t>
-            </a:r>
-            <a:r>
-              <a:rPr dirty="0" err="1"/>
-              <a:t>résultat</a:t>
-            </a:r>
-            <a:r>
-              <a:rPr dirty="0"/>
-              <a:t>.</a:t>
-            </a:r>
-          </a:p>
-          <a:p>
-            <a:r>
-              <a:rPr dirty="0"/>
-              <a:t>Il pose </a:t>
-            </a:r>
-            <a:r>
-              <a:rPr dirty="0" err="1"/>
-              <a:t>enfin</a:t>
-            </a:r>
-            <a:r>
-              <a:rPr dirty="0"/>
-              <a:t> </a:t>
-            </a:r>
-            <a:r>
-              <a:rPr dirty="0" err="1"/>
-              <a:t>une</a:t>
-            </a:r>
-            <a:r>
-              <a:rPr dirty="0"/>
-              <a:t> </a:t>
-            </a:r>
-            <a:r>
-              <a:rPr dirty="0" err="1"/>
-              <a:t>règle</a:t>
-            </a:r>
-            <a:r>
-              <a:rPr dirty="0"/>
-              <a:t> : laissez </a:t>
-            </a:r>
-            <a:r>
-              <a:rPr dirty="0" err="1"/>
-              <a:t>toujours</a:t>
-            </a:r>
-            <a:r>
-              <a:rPr dirty="0"/>
-              <a:t> </a:t>
-            </a:r>
-            <a:r>
-              <a:rPr dirty="0" err="1"/>
-              <a:t>votre</a:t>
-            </a:r>
-            <a:r>
-              <a:rPr dirty="0"/>
-              <a:t> code </a:t>
-            </a:r>
-            <a:r>
-              <a:rPr dirty="0" err="1"/>
-              <a:t>compilable</a:t>
-            </a:r>
-            <a:r>
-              <a:rPr dirty="0"/>
-              <a:t>. Tout le dossier </a:t>
-            </a:r>
-            <a:r>
-              <a:rPr dirty="0" err="1">
-                <a:latin typeface="Consolas"/>
-              </a:rPr>
-              <a:t>src</a:t>
+              <a:t>IDE</a:t>
+            </a:r>
+            <a:r>
+              <a:rPr dirty="0"/>
+              <a:t> et </a:t>
             </a:r>
             <a:r>
               <a:rPr dirty="0">
                 <a:latin typeface="Consolas"/>
               </a:rPr>
-              <a:t>/main/java</a:t>
-            </a:r>
-            <a:r>
-              <a:rPr dirty="0"/>
-              <a:t> se compile d</a:t>
-            </a:r>
-            <a:r>
-              <a:rPr lang="fr-BE" dirty="0"/>
-              <a:t>'</a:t>
-            </a:r>
-            <a:r>
-              <a:rPr dirty="0"/>
-              <a:t>un seul bloc ; un </a:t>
-            </a:r>
-            <a:r>
-              <a:rPr dirty="0" err="1"/>
-              <a:t>exercice</a:t>
-            </a:r>
-            <a:r>
-              <a:rPr dirty="0"/>
-              <a:t> </a:t>
-            </a:r>
-            <a:r>
-              <a:rPr dirty="0" err="1"/>
-              <a:t>laissé</a:t>
-            </a:r>
-            <a:r>
-              <a:rPr dirty="0"/>
-              <a:t> à </a:t>
-            </a:r>
-            <a:r>
-              <a:rPr dirty="0" err="1"/>
-              <a:t>moitié</a:t>
-            </a:r>
-            <a:r>
-              <a:rPr dirty="0"/>
-              <a:t> </a:t>
-            </a:r>
-            <a:r>
-              <a:rPr dirty="0" err="1"/>
-              <a:t>écrit</a:t>
-            </a:r>
-            <a:r>
-              <a:rPr dirty="0"/>
-              <a:t> </a:t>
-            </a:r>
-            <a:r>
-              <a:rPr dirty="0" err="1"/>
-              <a:t>empêche</a:t>
-            </a:r>
-            <a:r>
-              <a:rPr dirty="0"/>
-              <a:t> de lancer </a:t>
-            </a:r>
-            <a:r>
-              <a:rPr dirty="0" err="1"/>
-              <a:t>tous</a:t>
-            </a:r>
-            <a:r>
-              <a:rPr dirty="0"/>
-              <a:t> les </a:t>
-            </a:r>
-            <a:r>
-              <a:rPr dirty="0" err="1"/>
-              <a:t>autres</a:t>
-            </a:r>
-            <a:r>
-              <a:rPr dirty="0"/>
-              <a:t>, y </a:t>
-            </a:r>
-            <a:r>
-              <a:rPr dirty="0" err="1"/>
-              <a:t>compris</a:t>
-            </a:r>
-            <a:r>
-              <a:rPr dirty="0"/>
-              <a:t> </a:t>
-            </a:r>
-            <a:r>
-              <a:rPr dirty="0" err="1"/>
-              <a:t>ceux</a:t>
-            </a:r>
-            <a:r>
-              <a:rPr dirty="0"/>
-              <a:t> des séances </a:t>
-            </a:r>
-            <a:r>
-              <a:rPr dirty="0" err="1"/>
-              <a:t>précédentes</a:t>
-            </a:r>
-            <a:r>
-              <a:rPr dirty="0"/>
-              <a:t>. Avant de passer à </a:t>
-            </a:r>
-            <a:r>
-              <a:rPr dirty="0" err="1"/>
-              <a:t>autre</a:t>
-            </a:r>
-            <a:r>
-              <a:rPr dirty="0"/>
-              <a:t> chose, </a:t>
-            </a:r>
-            <a:r>
-              <a:rPr dirty="0" err="1"/>
-              <a:t>vérifiez</a:t>
-            </a:r>
-            <a:r>
-              <a:rPr dirty="0"/>
-              <a:t> </a:t>
-            </a:r>
-            <a:r>
-              <a:rPr dirty="0" err="1"/>
-              <a:t>que</a:t>
-            </a:r>
-            <a:r>
-              <a:rPr dirty="0"/>
-              <a:t> </a:t>
-            </a:r>
-            <a:r>
-              <a:rPr dirty="0" err="1"/>
-              <a:t>votre</a:t>
-            </a:r>
-            <a:r>
-              <a:rPr dirty="0"/>
-              <a:t> code compile. Sinon, deux issues : le </a:t>
-            </a:r>
-            <a:r>
-              <a:rPr dirty="0" err="1"/>
-              <a:t>corriger</a:t>
-            </a:r>
-            <a:r>
-              <a:rPr dirty="0"/>
-              <a:t>, </a:t>
-            </a:r>
-            <a:r>
-              <a:rPr dirty="0" err="1"/>
-              <a:t>ou</a:t>
-            </a:r>
-            <a:r>
-              <a:rPr dirty="0"/>
-              <a:t> </a:t>
-            </a:r>
-            <a:r>
-              <a:rPr dirty="0" err="1"/>
-              <a:t>mettre</a:t>
-            </a:r>
-            <a:r>
-              <a:rPr dirty="0"/>
-              <a:t> le morceau </a:t>
-            </a:r>
-            <a:r>
-              <a:rPr dirty="0" err="1"/>
-              <a:t>en</a:t>
-            </a:r>
-            <a:r>
-              <a:rPr dirty="0"/>
-              <a:t> </a:t>
-            </a:r>
-            <a:r>
-              <a:rPr dirty="0" err="1"/>
-              <a:t>chantier</a:t>
-            </a:r>
-            <a:r>
-              <a:rPr dirty="0"/>
-              <a:t> entre </a:t>
-            </a:r>
-            <a:r>
-              <a:rPr dirty="0" err="1"/>
-              <a:t>commentaires</a:t>
-            </a:r>
-            <a:r>
-              <a:rPr dirty="0"/>
-              <a:t> avec </a:t>
+              <a:t>ERR</a:t>
+            </a:r>
+            <a:r>
+              <a:rPr dirty="0"/>
+              <a:t> pour le guide IntelliJ, </a:t>
             </a:r>
             <a:r>
               <a:rPr dirty="0">
                 <a:latin typeface="Consolas"/>
               </a:rPr>
-              <a:t>Ctrl+/</a:t>
-            </a:r>
-            <a:r>
-              <a:rPr dirty="0"/>
-              <a:t> (</a:t>
+              <a:t>TEC</a:t>
+            </a:r>
+            <a:r>
+              <a:rPr dirty="0"/>
+              <a:t> pour le </a:t>
+            </a:r>
+            <a:r>
+              <a:rPr dirty="0" err="1"/>
+              <a:t>mémento</a:t>
+            </a:r>
+            <a:r>
+              <a:rPr dirty="0"/>
+              <a:t> technique, </a:t>
             </a:r>
             <a:r>
               <a:rPr dirty="0">
                 <a:latin typeface="Consolas"/>
               </a:rPr>
-              <a:t>⌘/</a:t>
-            </a:r>
-            <a:r>
-              <a:rPr dirty="0"/>
-              <a:t> sur Mac). C</a:t>
-            </a:r>
-            <a:r>
-              <a:rPr lang="fr-BE" dirty="0"/>
-              <a:t>'</a:t>
-            </a:r>
-            <a:r>
-              <a:rPr dirty="0"/>
-              <a:t>est </a:t>
-            </a:r>
-            <a:r>
-              <a:rPr dirty="0" err="1"/>
-              <a:t>aussi</a:t>
+              <a:t>CC</a:t>
+            </a:r>
+            <a:r>
+              <a:rPr dirty="0"/>
+              <a:t> pour le </a:t>
+            </a:r>
+            <a:r>
+              <a:rPr dirty="0" err="1"/>
+              <a:t>mémento</a:t>
+            </a:r>
+            <a:r>
+              <a:rPr dirty="0"/>
+              <a:t> Clean Code. </a:t>
+            </a:r>
+            <a:r>
+              <a:rPr dirty="0" err="1"/>
+              <a:t>Leurs</a:t>
             </a:r>
             <a:r>
               <a:rPr dirty="0"/>
@@ -4222,7 +3641,15 @@
             </a:r>
             <a:r>
               <a:rPr dirty="0" err="1"/>
-              <a:t>ce</a:t>
+              <a:t>sommaires</a:t>
+            </a:r>
+            <a:r>
+              <a:rPr dirty="0"/>
+              <a:t> et </a:t>
+            </a:r>
+            <a:r>
+              <a:rPr dirty="0" err="1"/>
+              <a:t>leurs</a:t>
             </a:r>
             <a:r>
               <a:rPr dirty="0"/>
@@ -4230,27 +3657,27 @@
             </a:r>
             <a:r>
               <a:rPr dirty="0" err="1"/>
-              <a:t>que</a:t>
-            </a:r>
-            <a:r>
-              <a:rPr dirty="0"/>
-              <a:t> l</a:t>
-            </a:r>
-            <a:r>
-              <a:rPr lang="fr-BE" dirty="0"/>
-              <a:t>'</a:t>
-            </a:r>
-            <a:r>
-              <a:rPr dirty="0"/>
-              <a:t>examen </a:t>
-            </a:r>
-            <a:r>
-              <a:rPr dirty="0" err="1"/>
-              <a:t>demande</a:t>
-            </a:r>
-            <a:r>
-              <a:rPr dirty="0"/>
-              <a:t> : on y rend du code qui compile.</a:t>
+              <a:t>renvois</a:t>
+            </a:r>
+            <a:r>
+              <a:rPr dirty="0"/>
+              <a:t> internes </a:t>
+            </a:r>
+            <a:r>
+              <a:rPr dirty="0" err="1"/>
+              <a:t>sont</a:t>
+            </a:r>
+            <a:r>
+              <a:rPr dirty="0"/>
+              <a:t> </a:t>
+            </a:r>
+            <a:r>
+              <a:rPr dirty="0" err="1"/>
+              <a:t>cliquables</a:t>
+            </a:r>
+            <a:r>
+              <a:rPr dirty="0"/>
+              <a:t>.</a:t>
             </a:r>
           </a:p>
         </p:txBody>
@@ -4321,11 +3748,11 @@
           <a:p>
             <a:r>
               <a:rPr dirty="0"/>
-              <a:t>Le guide </a:t>
-            </a:r>
-            <a:r>
-              <a:rPr dirty="0" err="1"/>
-              <a:t>couvre</a:t>
+              <a:t>Le </a:t>
+            </a:r>
+            <a:r>
+              <a:rPr dirty="0" err="1"/>
+              <a:t>mémento</a:t>
             </a:r>
             <a:r>
               <a:rPr dirty="0"/>
@@ -4333,11 +3760,43 @@
             </a:r>
             <a:r>
               <a:rPr dirty="0" err="1"/>
+              <a:t>Exercices</a:t>
+            </a:r>
+            <a:r>
+              <a:rPr dirty="0"/>
+              <a:t> </a:t>
+            </a:r>
+            <a:r>
+              <a:rPr dirty="0" err="1"/>
+              <a:t>rassemble</a:t>
+            </a:r>
+            <a:r>
+              <a:rPr dirty="0"/>
+              <a:t> </a:t>
+            </a:r>
+            <a:r>
+              <a:rPr dirty="0" err="1"/>
               <a:t>ce</a:t>
             </a:r>
             <a:r>
               <a:rPr dirty="0"/>
-              <a:t> </a:t>
+              <a:t> qui </a:t>
+            </a:r>
+            <a:r>
+              <a:rPr dirty="0" err="1"/>
+              <a:t>vaut</a:t>
+            </a:r>
+            <a:r>
+              <a:rPr dirty="0"/>
+              <a:t> pour </a:t>
+            </a:r>
+            <a:r>
+              <a:rPr dirty="0" err="1"/>
+              <a:t>tous</a:t>
+            </a:r>
+            <a:r>
+              <a:rPr dirty="0"/>
+              <a:t> les fascicules, et </a:t>
             </a:r>
             <a:r>
               <a:rPr dirty="0" err="1"/>
@@ -4349,135 +3808,111 @@
             </a:r>
             <a:r>
               <a:rPr dirty="0"/>
-              <a:t>il faut savoir d</a:t>
+              <a:t>il </a:t>
+            </a:r>
+            <a:r>
+              <a:rPr dirty="0" err="1"/>
+              <a:t>serait</a:t>
+            </a:r>
+            <a:r>
+              <a:rPr dirty="0"/>
+              <a:t> inutile de </a:t>
+            </a:r>
+            <a:r>
+              <a:rPr dirty="0" err="1"/>
+              <a:t>répéter</a:t>
+            </a:r>
+            <a:r>
+              <a:rPr dirty="0"/>
+              <a:t> dans chacun. </a:t>
+            </a:r>
+            <a:r>
+              <a:rPr dirty="0" err="1"/>
+              <a:t>Lisez</a:t>
+            </a:r>
+            <a:r>
+              <a:rPr dirty="0"/>
+              <a:t>-le </a:t>
+            </a:r>
+            <a:r>
+              <a:rPr dirty="0" err="1"/>
+              <a:t>une</a:t>
+            </a:r>
+            <a:r>
+              <a:rPr dirty="0"/>
+              <a:t> </a:t>
+            </a:r>
+            <a:r>
+              <a:rPr dirty="0" err="1"/>
+              <a:t>fois</a:t>
+            </a:r>
+            <a:r>
+              <a:rPr dirty="0"/>
+              <a:t> </a:t>
+            </a:r>
+            <a:r>
+              <a:rPr dirty="0" err="1"/>
+              <a:t>en</a:t>
+            </a:r>
+            <a:r>
+              <a:rPr dirty="0"/>
+              <a:t> début d</a:t>
             </a:r>
             <a:r>
               <a:rPr lang="fr-BE" dirty="0"/>
               <a:t>'</a:t>
             </a:r>
             <a:r>
-              <a:rPr dirty="0"/>
-              <a:t>IntelliJ pour </a:t>
-            </a:r>
-            <a:r>
-              <a:rPr dirty="0" err="1"/>
-              <a:t>ce</a:t>
-            </a:r>
-            <a:r>
-              <a:rPr dirty="0"/>
-              <a:t> </a:t>
-            </a:r>
-            <a:r>
-              <a:rPr dirty="0" err="1"/>
-              <a:t>cours</a:t>
-            </a:r>
-            <a:r>
-              <a:rPr dirty="0"/>
-              <a:t>, captures d</a:t>
+              <a:rPr dirty="0" err="1"/>
+              <a:t>année</a:t>
+            </a:r>
+            <a:r>
+              <a:rPr dirty="0"/>
+              <a:t>.</a:t>
+            </a:r>
+          </a:p>
+          <a:p>
+            <a:r>
+              <a:rPr dirty="0"/>
+              <a:t>Il </a:t>
+            </a:r>
+            <a:r>
+              <a:rPr dirty="0" err="1"/>
+              <a:t>explique</a:t>
+            </a:r>
+            <a:r>
+              <a:rPr dirty="0"/>
+              <a:t> d</a:t>
             </a:r>
             <a:r>
               <a:rPr lang="fr-BE" dirty="0"/>
               <a:t>'</a:t>
             </a:r>
             <a:r>
-              <a:rPr dirty="0" err="1"/>
-              <a:t>écran</a:t>
-            </a:r>
-            <a:r>
-              <a:rPr dirty="0"/>
-              <a:t> à l</a:t>
-            </a:r>
-            <a:r>
-              <a:rPr lang="fr-BE" dirty="0"/>
-              <a:t>'</a:t>
-            </a:r>
-            <a:r>
-              <a:rPr dirty="0" err="1"/>
-              <a:t>appui</a:t>
-            </a:r>
-            <a:r>
-              <a:rPr dirty="0"/>
-              <a:t> : l</a:t>
-            </a:r>
-            <a:r>
-              <a:rPr lang="fr-BE" dirty="0"/>
-              <a:t>'</a:t>
-            </a:r>
-            <a:r>
-              <a:rPr dirty="0"/>
-              <a:t>installation, la </a:t>
-            </a:r>
-            <a:r>
-              <a:rPr dirty="0" err="1"/>
-              <a:t>création</a:t>
-            </a:r>
-            <a:r>
-              <a:rPr dirty="0"/>
-              <a:t> et l</a:t>
-            </a:r>
-            <a:r>
-              <a:rPr lang="fr-BE" dirty="0"/>
-              <a:t>'</a:t>
-            </a:r>
-            <a:r>
-              <a:rPr dirty="0"/>
-              <a:t>ouverture d</a:t>
-            </a:r>
-            <a:r>
-              <a:rPr lang="fr-BE" dirty="0"/>
-              <a:t>'</a:t>
-            </a:r>
-            <a:r>
-              <a:rPr dirty="0"/>
-              <a:t>un </a:t>
-            </a:r>
-            <a:r>
-              <a:rPr dirty="0" err="1"/>
-              <a:t>projet</a:t>
-            </a:r>
-            <a:r>
-              <a:rPr dirty="0"/>
-              <a:t>, l</a:t>
-            </a:r>
-            <a:r>
-              <a:rPr lang="fr-BE" dirty="0"/>
-              <a:t>'</a:t>
-            </a:r>
-            <a:r>
-              <a:rPr dirty="0" err="1"/>
-              <a:t>exécution</a:t>
-            </a:r>
-            <a:r>
-              <a:rPr dirty="0"/>
-              <a:t>, le </a:t>
-            </a:r>
-            <a:r>
-              <a:rPr dirty="0" err="1"/>
-              <a:t>débogage</a:t>
-            </a:r>
-            <a:r>
-              <a:rPr dirty="0"/>
-              <a:t>, le </a:t>
-            </a:r>
-            <a:r>
-              <a:rPr dirty="0" err="1"/>
-              <a:t>paramétrage</a:t>
-            </a:r>
-            <a:r>
-              <a:rPr dirty="0"/>
-              <a:t>.</a:t>
-            </a:r>
-          </a:p>
-          <a:p>
-            <a:r>
-              <a:rPr dirty="0"/>
-              <a:t>Les entrées </a:t>
+              <a:rPr dirty="0"/>
+              <a:t>abord la </a:t>
+            </a:r>
+            <a:r>
+              <a:rPr dirty="0" err="1"/>
+              <a:t>numérotation</a:t>
+            </a:r>
+            <a:r>
+              <a:rPr dirty="0"/>
+              <a:t> : </a:t>
             </a:r>
             <a:r>
               <a:rPr dirty="0">
                 <a:latin typeface="Consolas"/>
               </a:rPr>
-              <a:t>ERR</a:t>
+              <a:t>EXC.3</a:t>
+            </a:r>
+            <a:r>
+              <a:rPr dirty="0"/>
+              <a:t> est le </a:t>
+            </a:r>
+            <a:r>
+              <a:rPr dirty="0" err="1"/>
+              <a:t>troisième</a:t>
             </a:r>
             <a:r>
               <a:rPr dirty="0"/>
@@ -4485,23 +3920,63 @@
             </a:r>
             <a:r>
               <a:rPr dirty="0" err="1"/>
-              <a:t>partent</a:t>
-            </a:r>
-            <a:r>
-              <a:rPr dirty="0"/>
-              <a:t> du message </a:t>
-            </a:r>
-            <a:r>
-              <a:rPr dirty="0" err="1"/>
-              <a:t>affiché</a:t>
-            </a:r>
-            <a:r>
-              <a:rPr dirty="0"/>
-              <a:t> et </a:t>
-            </a:r>
-            <a:r>
-              <a:rPr dirty="0" err="1"/>
-              <a:t>expliquent</a:t>
+              <a:t>exercice</a:t>
+            </a:r>
+            <a:r>
+              <a:rPr dirty="0"/>
+              <a:t> du </a:t>
+            </a:r>
+            <a:r>
+              <a:rPr dirty="0" err="1"/>
+              <a:t>module</a:t>
+            </a:r>
+            <a:r>
+              <a:rPr dirty="0"/>
+              <a:t> Exceptions, quelle </a:t>
+            </a:r>
+            <a:r>
+              <a:rPr dirty="0" err="1"/>
+              <a:t>que</a:t>
+            </a:r>
+            <a:r>
+              <a:rPr dirty="0"/>
+              <a:t> soit la séance </a:t>
+            </a:r>
+            <a:r>
+              <a:rPr dirty="0" err="1"/>
+              <a:t>où</a:t>
+            </a:r>
+            <a:r>
+              <a:rPr dirty="0"/>
+              <a:t> il </a:t>
+            </a:r>
+            <a:r>
+              <a:rPr dirty="0" err="1"/>
+              <a:t>tombe</a:t>
+            </a:r>
+            <a:r>
+              <a:rPr dirty="0"/>
+              <a:t>. Un </a:t>
+            </a:r>
+            <a:r>
+              <a:rPr dirty="0" err="1"/>
+              <a:t>exercice</a:t>
+            </a:r>
+            <a:r>
+              <a:rPr dirty="0"/>
+              <a:t> garde </a:t>
+            </a:r>
+            <a:r>
+              <a:rPr dirty="0" err="1"/>
+              <a:t>donc</a:t>
+            </a:r>
+            <a:r>
+              <a:rPr dirty="0"/>
+              <a:t> son code </a:t>
+            </a:r>
+            <a:r>
+              <a:rPr dirty="0" err="1"/>
+              <a:t>même</a:t>
             </a:r>
             <a:r>
               <a:rPr dirty="0"/>
@@ -4509,11 +3984,119 @@
             </a:r>
             <a:r>
               <a:rPr dirty="0" err="1"/>
-              <a:t>sa</a:t>
-            </a:r>
-            <a:r>
-              <a:rPr dirty="0"/>
-              <a:t> cause la plus probable. C</a:t>
+              <a:t>si</a:t>
+            </a:r>
+            <a:r>
+              <a:rPr dirty="0"/>
+              <a:t> le </a:t>
+            </a:r>
+            <a:r>
+              <a:rPr dirty="0" err="1"/>
+              <a:t>calendrier</a:t>
+            </a:r>
+            <a:r>
+              <a:rPr dirty="0"/>
+              <a:t> change.</a:t>
+            </a:r>
+          </a:p>
+          <a:p>
+            <a:r>
+              <a:rPr dirty="0"/>
+              <a:t>Il montre ensuite comment lancer les classes de test </a:t>
+            </a:r>
+            <a:r>
+              <a:rPr dirty="0" err="1"/>
+              <a:t>fournies</a:t>
+            </a:r>
+            <a:r>
+              <a:rPr dirty="0"/>
+              <a:t>, et comment lire </a:t>
+            </a:r>
+            <a:r>
+              <a:rPr dirty="0" err="1"/>
+              <a:t>leur</a:t>
+            </a:r>
+            <a:r>
+              <a:rPr dirty="0"/>
+              <a:t> </a:t>
+            </a:r>
+            <a:r>
+              <a:rPr dirty="0" err="1"/>
+              <a:t>résultat</a:t>
+            </a:r>
+            <a:r>
+              <a:rPr dirty="0"/>
+              <a:t>.</a:t>
+            </a:r>
+          </a:p>
+          <a:p>
+            <a:r>
+              <a:rPr dirty="0"/>
+              <a:t>Il pose </a:t>
+            </a:r>
+            <a:r>
+              <a:rPr dirty="0" err="1"/>
+              <a:t>enfin</a:t>
+            </a:r>
+            <a:r>
+              <a:rPr dirty="0"/>
+              <a:t> </a:t>
+            </a:r>
+            <a:r>
+              <a:rPr dirty="0" err="1"/>
+              <a:t>une</a:t>
+            </a:r>
+            <a:r>
+              <a:rPr dirty="0"/>
+              <a:t> </a:t>
+            </a:r>
+            <a:r>
+              <a:rPr dirty="0" err="1"/>
+              <a:t>règle</a:t>
+            </a:r>
+            <a:r>
+              <a:rPr dirty="0"/>
+              <a:t> : laissez </a:t>
+            </a:r>
+            <a:r>
+              <a:rPr dirty="0" err="1"/>
+              <a:t>toujours</a:t>
+            </a:r>
+            <a:r>
+              <a:rPr dirty="0"/>
+              <a:t> </a:t>
+            </a:r>
+            <a:r>
+              <a:rPr dirty="0" err="1"/>
+              <a:t>votre</a:t>
+            </a:r>
+            <a:r>
+              <a:rPr dirty="0"/>
+              <a:t> code </a:t>
+            </a:r>
+            <a:r>
+              <a:rPr dirty="0" err="1"/>
+              <a:t>compilable</a:t>
+            </a:r>
+            <a:r>
+              <a:rPr dirty="0"/>
+              <a:t>. Tout le dossier </a:t>
+            </a:r>
+            <a:r>
+              <a:rPr dirty="0" err="1">
+                <a:latin typeface="Consolas"/>
+              </a:rPr>
+              <a:t>src</a:t>
+            </a:r>
+            <a:r>
+              <a:rPr dirty="0">
+                <a:latin typeface="Consolas"/>
+              </a:rPr>
+              <a:t>/main/java</a:t>
+            </a:r>
+            <a:r>
+              <a:rPr dirty="0"/>
+              <a:t> se compile d</a:t>
             </a:r>
             <a:r>
               <a:rPr lang="fr-BE" dirty="0"/>
@@ -4521,11 +4104,19 @@
             </a:r>
             <a:r>
               <a:rPr dirty="0"/>
-              <a:t>est le premier </a:t>
-            </a:r>
-            <a:r>
-              <a:rPr dirty="0" err="1"/>
-              <a:t>réflexe</a:t>
+              <a:t>un seul bloc ; un </a:t>
+            </a:r>
+            <a:r>
+              <a:rPr dirty="0" err="1"/>
+              <a:t>exercice</a:t>
+            </a:r>
+            <a:r>
+              <a:rPr dirty="0"/>
+              <a:t> </a:t>
+            </a:r>
+            <a:r>
+              <a:rPr dirty="0" err="1"/>
+              <a:t>laissé</a:t>
             </a:r>
             <a:r>
               <a:rPr dirty="0"/>
@@ -4533,7 +4124,7 @@
             </a:r>
             <a:r>
               <a:rPr dirty="0" err="1"/>
-              <a:t>avoir</a:t>
+              <a:t>moitié</a:t>
             </a:r>
             <a:r>
               <a:rPr dirty="0"/>
@@ -4541,19 +4132,207 @@
             </a:r>
             <a:r>
               <a:rPr dirty="0" err="1"/>
-              <a:t>quand</a:t>
-            </a:r>
-            <a:r>
-              <a:rPr dirty="0"/>
-              <a:t> quelque chose ne </a:t>
-            </a:r>
-            <a:r>
-              <a:rPr dirty="0" err="1"/>
-              <a:t>fonctionne</a:t>
-            </a:r>
-            <a:r>
-              <a:rPr dirty="0"/>
-              <a:t> pas.</a:t>
+              <a:t>écrit</a:t>
+            </a:r>
+            <a:r>
+              <a:rPr dirty="0"/>
+              <a:t> </a:t>
+            </a:r>
+            <a:r>
+              <a:rPr dirty="0" err="1"/>
+              <a:t>empêche</a:t>
+            </a:r>
+            <a:r>
+              <a:rPr dirty="0"/>
+              <a:t> de lancer </a:t>
+            </a:r>
+            <a:r>
+              <a:rPr dirty="0" err="1"/>
+              <a:t>tous</a:t>
+            </a:r>
+            <a:r>
+              <a:rPr dirty="0"/>
+              <a:t> les </a:t>
+            </a:r>
+            <a:r>
+              <a:rPr dirty="0" err="1"/>
+              <a:t>autres</a:t>
+            </a:r>
+            <a:r>
+              <a:rPr dirty="0"/>
+              <a:t>, y </a:t>
+            </a:r>
+            <a:r>
+              <a:rPr dirty="0" err="1"/>
+              <a:t>compris</a:t>
+            </a:r>
+            <a:r>
+              <a:rPr dirty="0"/>
+              <a:t> </a:t>
+            </a:r>
+            <a:r>
+              <a:rPr dirty="0" err="1"/>
+              <a:t>ceux</a:t>
+            </a:r>
+            <a:r>
+              <a:rPr dirty="0"/>
+              <a:t> des séances </a:t>
+            </a:r>
+            <a:r>
+              <a:rPr dirty="0" err="1"/>
+              <a:t>précédentes</a:t>
+            </a:r>
+            <a:r>
+              <a:rPr dirty="0"/>
+              <a:t>. Avant de passer à </a:t>
+            </a:r>
+            <a:r>
+              <a:rPr dirty="0" err="1"/>
+              <a:t>autre</a:t>
+            </a:r>
+            <a:r>
+              <a:rPr dirty="0"/>
+              <a:t> chose, </a:t>
+            </a:r>
+            <a:r>
+              <a:rPr dirty="0" err="1"/>
+              <a:t>vérifiez</a:t>
+            </a:r>
+            <a:r>
+              <a:rPr dirty="0"/>
+              <a:t> </a:t>
+            </a:r>
+            <a:r>
+              <a:rPr dirty="0" err="1"/>
+              <a:t>que</a:t>
+            </a:r>
+            <a:r>
+              <a:rPr dirty="0"/>
+              <a:t> </a:t>
+            </a:r>
+            <a:r>
+              <a:rPr dirty="0" err="1"/>
+              <a:t>votre</a:t>
+            </a:r>
+            <a:r>
+              <a:rPr dirty="0"/>
+              <a:t> code compile. Sinon, deux issues : le </a:t>
+            </a:r>
+            <a:r>
+              <a:rPr dirty="0" err="1"/>
+              <a:t>corriger</a:t>
+            </a:r>
+            <a:r>
+              <a:rPr dirty="0"/>
+              <a:t>, </a:t>
+            </a:r>
+            <a:r>
+              <a:rPr dirty="0" err="1"/>
+              <a:t>ou</a:t>
+            </a:r>
+            <a:r>
+              <a:rPr dirty="0"/>
+              <a:t> </a:t>
+            </a:r>
+            <a:r>
+              <a:rPr dirty="0" err="1"/>
+              <a:t>mettre</a:t>
+            </a:r>
+            <a:r>
+              <a:rPr dirty="0"/>
+              <a:t> le morceau </a:t>
+            </a:r>
+            <a:r>
+              <a:rPr dirty="0" err="1"/>
+              <a:t>en</a:t>
+            </a:r>
+            <a:r>
+              <a:rPr dirty="0"/>
+              <a:t> </a:t>
+            </a:r>
+            <a:r>
+              <a:rPr dirty="0" err="1"/>
+              <a:t>chantier</a:t>
+            </a:r>
+            <a:r>
+              <a:rPr dirty="0"/>
+              <a:t> entre </a:t>
+            </a:r>
+            <a:r>
+              <a:rPr dirty="0" err="1"/>
+              <a:t>commentaires</a:t>
+            </a:r>
+            <a:r>
+              <a:rPr dirty="0"/>
+              <a:t> avec </a:t>
+            </a:r>
+            <a:r>
+              <a:rPr dirty="0">
+                <a:latin typeface="Consolas"/>
+              </a:rPr>
+              <a:t>Ctrl+/</a:t>
+            </a:r>
+            <a:r>
+              <a:rPr dirty="0"/>
+              <a:t> (</a:t>
+            </a:r>
+            <a:r>
+              <a:rPr dirty="0">
+                <a:latin typeface="Consolas"/>
+              </a:rPr>
+              <a:t>⌘/</a:t>
+            </a:r>
+            <a:r>
+              <a:rPr dirty="0"/>
+              <a:t> sur Mac). C</a:t>
+            </a:r>
+            <a:r>
+              <a:rPr lang="fr-BE" dirty="0"/>
+              <a:t>'</a:t>
+            </a:r>
+            <a:r>
+              <a:rPr dirty="0"/>
+              <a:t>est </a:t>
+            </a:r>
+            <a:r>
+              <a:rPr dirty="0" err="1"/>
+              <a:t>aussi</a:t>
+            </a:r>
+            <a:r>
+              <a:rPr dirty="0"/>
+              <a:t> </a:t>
+            </a:r>
+            <a:r>
+              <a:rPr dirty="0" err="1"/>
+              <a:t>ce</a:t>
+            </a:r>
+            <a:r>
+              <a:rPr dirty="0"/>
+              <a:t> </a:t>
+            </a:r>
+            <a:r>
+              <a:rPr dirty="0" err="1"/>
+              <a:t>que</a:t>
+            </a:r>
+            <a:r>
+              <a:rPr dirty="0"/>
+              <a:t> l</a:t>
+            </a:r>
+            <a:r>
+              <a:rPr lang="fr-BE" dirty="0"/>
+              <a:t>'</a:t>
+            </a:r>
+            <a:r>
+              <a:rPr dirty="0"/>
+              <a:t>examen </a:t>
+            </a:r>
+            <a:r>
+              <a:rPr dirty="0" err="1"/>
+              <a:t>demande</a:t>
+            </a:r>
+            <a:r>
+              <a:rPr dirty="0"/>
+              <a:t> : on y rend du code qui compile.</a:t>
             </a:r>
           </a:p>
         </p:txBody>
@@ -4624,19 +4403,11 @@
           <a:p>
             <a:r>
               <a:rPr dirty="0"/>
-              <a:t>Le </a:t>
-            </a:r>
-            <a:r>
-              <a:rPr dirty="0" err="1"/>
-              <a:t>mémento</a:t>
-            </a:r>
-            <a:r>
-              <a:rPr dirty="0"/>
-              <a:t> technique </a:t>
-            </a:r>
-            <a:r>
-              <a:rPr dirty="0" err="1"/>
-              <a:t>explique</a:t>
+              <a:t>Le guide </a:t>
+            </a:r>
+            <a:r>
+              <a:rPr dirty="0" err="1"/>
+              <a:t>couvre</a:t>
             </a:r>
             <a:r>
               <a:rPr dirty="0"/>
@@ -4660,15 +4431,15 @@
             </a:r>
             <a:r>
               <a:rPr dirty="0"/>
-              <a:t>IntelliJ fait à </a:t>
-            </a:r>
-            <a:r>
-              <a:rPr dirty="0" err="1"/>
-              <a:t>votre</a:t>
-            </a:r>
-            <a:r>
-              <a:rPr dirty="0"/>
-              <a:t> place : </a:t>
+              <a:t>il faut savoir d</a:t>
+            </a:r>
+            <a:r>
+              <a:rPr lang="fr-BE" dirty="0"/>
+              <a:t>'</a:t>
+            </a:r>
+            <a:r>
+              <a:rPr dirty="0"/>
+              <a:t>IntelliJ pour </a:t>
             </a:r>
             <a:r>
               <a:rPr dirty="0" err="1"/>
@@ -4680,33 +4451,115 @@
             </a:r>
             <a:r>
               <a:rPr dirty="0" err="1"/>
-              <a:t>que</a:t>
-            </a:r>
-            <a:r>
-              <a:rPr dirty="0"/>
-              <a:t> </a:t>
-            </a:r>
-            <a:r>
-              <a:rPr dirty="0" err="1"/>
-              <a:t>sont</a:t>
-            </a:r>
-            <a:r>
-              <a:rPr dirty="0"/>
-              <a:t> la JVM, le JRE et le JDK, comment un </a:t>
-            </a:r>
-            <a:r>
-              <a:rPr dirty="0" err="1"/>
-              <a:t>fichier</a:t>
-            </a:r>
-            <a:r>
-              <a:rPr dirty="0"/>
-              <a:t> </a:t>
+              <a:t>cours</a:t>
+            </a:r>
+            <a:r>
+              <a:rPr dirty="0"/>
+              <a:t>, captures d</a:t>
+            </a:r>
+            <a:r>
+              <a:rPr lang="fr-BE" dirty="0"/>
+              <a:t>'</a:t>
+            </a:r>
+            <a:r>
+              <a:rPr dirty="0" err="1"/>
+              <a:t>écran</a:t>
+            </a:r>
+            <a:r>
+              <a:rPr dirty="0"/>
+              <a:t> à l</a:t>
+            </a:r>
+            <a:r>
+              <a:rPr lang="fr-BE" dirty="0"/>
+              <a:t>'</a:t>
+            </a:r>
+            <a:r>
+              <a:rPr dirty="0" err="1"/>
+              <a:t>appui</a:t>
+            </a:r>
+            <a:r>
+              <a:rPr dirty="0"/>
+              <a:t> : l</a:t>
+            </a:r>
+            <a:r>
+              <a:rPr lang="fr-BE" dirty="0"/>
+              <a:t>'</a:t>
+            </a:r>
+            <a:r>
+              <a:rPr dirty="0"/>
+              <a:t>installation, la </a:t>
+            </a:r>
+            <a:r>
+              <a:rPr dirty="0" err="1"/>
+              <a:t>création</a:t>
+            </a:r>
+            <a:r>
+              <a:rPr dirty="0"/>
+              <a:t> et l</a:t>
+            </a:r>
+            <a:r>
+              <a:rPr lang="fr-BE" dirty="0"/>
+              <a:t>'</a:t>
+            </a:r>
+            <a:r>
+              <a:rPr dirty="0"/>
+              <a:t>ouverture d</a:t>
+            </a:r>
+            <a:r>
+              <a:rPr lang="fr-BE" dirty="0"/>
+              <a:t>'</a:t>
+            </a:r>
+            <a:r>
+              <a:rPr dirty="0"/>
+              <a:t>un </a:t>
+            </a:r>
+            <a:r>
+              <a:rPr dirty="0" err="1"/>
+              <a:t>projet</a:t>
+            </a:r>
+            <a:r>
+              <a:rPr dirty="0"/>
+              <a:t>, l</a:t>
+            </a:r>
+            <a:r>
+              <a:rPr lang="fr-BE" dirty="0"/>
+              <a:t>'</a:t>
+            </a:r>
+            <a:r>
+              <a:rPr dirty="0" err="1"/>
+              <a:t>exécution</a:t>
+            </a:r>
+            <a:r>
+              <a:rPr dirty="0"/>
+              <a:t>, le </a:t>
+            </a:r>
+            <a:r>
+              <a:rPr dirty="0" err="1"/>
+              <a:t>débogage</a:t>
+            </a:r>
+            <a:r>
+              <a:rPr dirty="0"/>
+              <a:t>, le </a:t>
+            </a:r>
+            <a:r>
+              <a:rPr dirty="0" err="1"/>
+              <a:t>paramétrage</a:t>
+            </a:r>
+            <a:r>
+              <a:rPr dirty="0"/>
+              <a:t>.</a:t>
+            </a:r>
+          </a:p>
+          <a:p>
+            <a:r>
+              <a:rPr dirty="0"/>
+              <a:t>Les entrées </a:t>
             </a:r>
             <a:r>
               <a:rPr dirty="0">
                 <a:latin typeface="Consolas"/>
               </a:rPr>
-              <a:t>.java</a:t>
+              <a:t>ERR</a:t>
             </a:r>
             <a:r>
               <a:rPr dirty="0"/>
@@ -4714,45 +4567,23 @@
             </a:r>
             <a:r>
               <a:rPr dirty="0" err="1"/>
-              <a:t>devient</a:t>
-            </a:r>
-            <a:r>
-              <a:rPr dirty="0"/>
-              <a:t> un </a:t>
-            </a:r>
-            <a:r>
-              <a:rPr dirty="0" err="1"/>
-              <a:t>programme</a:t>
-            </a:r>
-            <a:r>
-              <a:rPr dirty="0"/>
-              <a:t>, comment Maven </a:t>
-            </a:r>
-            <a:r>
-              <a:rPr dirty="0" err="1"/>
-              <a:t>récupère</a:t>
-            </a:r>
-            <a:r>
-              <a:rPr dirty="0"/>
-              <a:t> les bibliothèques, comment se lance </a:t>
-            </a:r>
-            <a:r>
-              <a:rPr dirty="0" err="1"/>
-              <a:t>une</a:t>
-            </a:r>
-            <a:r>
-              <a:rPr dirty="0"/>
-              <a:t> application JavaFX.</a:t>
-            </a:r>
-          </a:p>
-          <a:p>
-            <a:r>
-              <a:rPr dirty="0"/>
-              <a:t>Vous </a:t>
-            </a:r>
-            <a:r>
-              <a:rPr dirty="0" err="1"/>
-              <a:t>pouvez</a:t>
+              <a:t>partent</a:t>
+            </a:r>
+            <a:r>
+              <a:rPr dirty="0"/>
+              <a:t> du message </a:t>
+            </a:r>
+            <a:r>
+              <a:rPr dirty="0" err="1"/>
+              <a:t>affiché</a:t>
+            </a:r>
+            <a:r>
+              <a:rPr dirty="0"/>
+              <a:t> et </a:t>
+            </a:r>
+            <a:r>
+              <a:rPr dirty="0" err="1"/>
+              <a:t>expliquent</a:t>
             </a:r>
             <a:r>
               <a:rPr dirty="0"/>
@@ -4760,7 +4591,31 @@
             </a:r>
             <a:r>
               <a:rPr dirty="0" err="1"/>
-              <a:t>écrire</a:t>
+              <a:t>sa</a:t>
+            </a:r>
+            <a:r>
+              <a:rPr dirty="0"/>
+              <a:t> cause la plus probable. C</a:t>
+            </a:r>
+            <a:r>
+              <a:rPr lang="fr-BE" dirty="0"/>
+              <a:t>'</a:t>
+            </a:r>
+            <a:r>
+              <a:rPr dirty="0"/>
+              <a:t>est le premier </a:t>
+            </a:r>
+            <a:r>
+              <a:rPr dirty="0" err="1"/>
+              <a:t>réflexe</a:t>
+            </a:r>
+            <a:r>
+              <a:rPr dirty="0"/>
+              <a:t> à </a:t>
+            </a:r>
+            <a:r>
+              <a:rPr dirty="0" err="1"/>
+              <a:t>avoir</a:t>
             </a:r>
             <a:r>
               <a:rPr dirty="0"/>
@@ -4768,67 +4623,19 @@
             </a:r>
             <a:r>
               <a:rPr dirty="0" err="1"/>
-              <a:t>vos</a:t>
-            </a:r>
-            <a:r>
-              <a:rPr dirty="0"/>
-              <a:t> premiers </a:t>
-            </a:r>
-            <a:r>
-              <a:rPr dirty="0" err="1"/>
-              <a:t>programmes</a:t>
-            </a:r>
-            <a:r>
-              <a:rPr dirty="0"/>
-              <a:t> sans le lire, </a:t>
-            </a:r>
-            <a:r>
-              <a:rPr dirty="0" err="1"/>
-              <a:t>mais</a:t>
-            </a:r>
-            <a:r>
-              <a:rPr dirty="0"/>
-              <a:t> il </a:t>
-            </a:r>
-            <a:r>
-              <a:rPr dirty="0" err="1"/>
-              <a:t>répond</a:t>
-            </a:r>
-            <a:r>
-              <a:rPr dirty="0"/>
-              <a:t> à la </a:t>
-            </a:r>
-            <a:r>
-              <a:rPr dirty="0" err="1"/>
-              <a:t>plupart</a:t>
-            </a:r>
-            <a:r>
-              <a:rPr dirty="0"/>
-              <a:t> des « </a:t>
-            </a:r>
-            <a:r>
-              <a:rPr dirty="0" err="1"/>
-              <a:t>pourquoi</a:t>
-            </a:r>
-            <a:r>
-              <a:rPr dirty="0"/>
-              <a:t> </a:t>
-            </a:r>
-            <a:r>
-              <a:rPr dirty="0" err="1"/>
-              <a:t>ça</a:t>
-            </a:r>
-            <a:r>
-              <a:rPr dirty="0"/>
-              <a:t> </a:t>
-            </a:r>
-            <a:r>
-              <a:rPr dirty="0" err="1"/>
-              <a:t>marche</a:t>
-            </a:r>
-            <a:r>
-              <a:rPr dirty="0"/>
-              <a:t> ? ».</a:t>
+              <a:t>quand</a:t>
+            </a:r>
+            <a:r>
+              <a:rPr dirty="0"/>
+              <a:t> quelque chose ne </a:t>
+            </a:r>
+            <a:r>
+              <a:rPr dirty="0" err="1"/>
+              <a:t>fonctionne</a:t>
+            </a:r>
+            <a:r>
+              <a:rPr dirty="0"/>
+              <a:t> pas.</a:t>
             </a:r>
           </a:p>
         </p:txBody>
@@ -4899,23 +4706,35 @@
           <a:p>
             <a:r>
               <a:rPr dirty="0"/>
-              <a:t>Un </a:t>
-            </a:r>
-            <a:r>
-              <a:rPr dirty="0" err="1"/>
-              <a:t>programme</a:t>
-            </a:r>
-            <a:r>
-              <a:rPr dirty="0"/>
-              <a:t> qui </a:t>
-            </a:r>
-            <a:r>
-              <a:rPr dirty="0" err="1"/>
-              <a:t>fonctionne</a:t>
-            </a:r>
-            <a:r>
-              <a:rPr dirty="0"/>
-              <a:t> n</a:t>
+              <a:t>Le </a:t>
+            </a:r>
+            <a:r>
+              <a:rPr dirty="0" err="1"/>
+              <a:t>mémento</a:t>
+            </a:r>
+            <a:r>
+              <a:rPr dirty="0"/>
+              <a:t> technique </a:t>
+            </a:r>
+            <a:r>
+              <a:rPr dirty="0" err="1"/>
+              <a:t>explique</a:t>
+            </a:r>
+            <a:r>
+              <a:rPr dirty="0"/>
+              <a:t> </a:t>
+            </a:r>
+            <a:r>
+              <a:rPr dirty="0" err="1"/>
+              <a:t>ce</a:t>
+            </a:r>
+            <a:r>
+              <a:rPr dirty="0"/>
+              <a:t> </a:t>
+            </a:r>
+            <a:r>
+              <a:rPr dirty="0" err="1"/>
+              <a:t>qu</a:t>
             </a:r>
             <a:r>
               <a:rPr lang="fr-BE" dirty="0"/>
@@ -4923,11 +4742,61 @@
             </a:r>
             <a:r>
               <a:rPr dirty="0"/>
-              <a:t>est pas </a:t>
-            </a:r>
-            <a:r>
-              <a:rPr dirty="0" err="1"/>
-              <a:t>forcément</a:t>
+              <a:t>IntelliJ fait à </a:t>
+            </a:r>
+            <a:r>
+              <a:rPr dirty="0" err="1"/>
+              <a:t>votre</a:t>
+            </a:r>
+            <a:r>
+              <a:rPr dirty="0"/>
+              <a:t> place : </a:t>
+            </a:r>
+            <a:r>
+              <a:rPr dirty="0" err="1"/>
+              <a:t>ce</a:t>
+            </a:r>
+            <a:r>
+              <a:rPr dirty="0"/>
+              <a:t> </a:t>
+            </a:r>
+            <a:r>
+              <a:rPr dirty="0" err="1"/>
+              <a:t>que</a:t>
+            </a:r>
+            <a:r>
+              <a:rPr dirty="0"/>
+              <a:t> </a:t>
+            </a:r>
+            <a:r>
+              <a:rPr dirty="0" err="1"/>
+              <a:t>sont</a:t>
+            </a:r>
+            <a:r>
+              <a:rPr dirty="0"/>
+              <a:t> la JVM, le JRE et le JDK, comment un </a:t>
+            </a:r>
+            <a:r>
+              <a:rPr dirty="0" err="1"/>
+              <a:t>fichier</a:t>
+            </a:r>
+            <a:r>
+              <a:rPr dirty="0"/>
+              <a:t> </a:t>
+            </a:r>
+            <a:r>
+              <a:rPr dirty="0">
+                <a:latin typeface="Consolas"/>
+              </a:rPr>
+              <a:t>.java</a:t>
+            </a:r>
+            <a:r>
+              <a:rPr dirty="0"/>
+              <a:t> </a:t>
+            </a:r>
+            <a:r>
+              <a:rPr dirty="0" err="1"/>
+              <a:t>devient</a:t>
             </a:r>
             <a:r>
               <a:rPr dirty="0"/>
@@ -4939,19 +4808,41 @@
             </a:r>
             <a:r>
               <a:rPr dirty="0"/>
+              <a:t>, comment Maven </a:t>
+            </a:r>
+            <a:r>
+              <a:rPr dirty="0" err="1"/>
+              <a:t>récupère</a:t>
+            </a:r>
+            <a:r>
+              <a:rPr dirty="0"/>
+              <a:t> les bibliothèques, comment se lance </a:t>
+            </a:r>
+            <a:r>
+              <a:rPr dirty="0" err="1"/>
+              <a:t>une</a:t>
+            </a:r>
+            <a:r>
+              <a:rPr dirty="0"/>
+              <a:t> application JavaFX.</a:t>
+            </a:r>
+          </a:p>
+          <a:p>
+            <a:r>
+              <a:rPr dirty="0"/>
+              <a:t>Vous </a:t>
+            </a:r>
+            <a:r>
+              <a:rPr dirty="0" err="1"/>
+              <a:t>pouvez</a:t>
+            </a:r>
+            <a:r>
+              <a:rPr dirty="0"/>
               <a:t> </a:t>
             </a:r>
             <a:r>
               <a:rPr dirty="0" err="1"/>
-              <a:t>lisible</a:t>
-            </a:r>
-            <a:r>
-              <a:rPr dirty="0"/>
-              <a:t>. Le </a:t>
-            </a:r>
-            <a:r>
-              <a:rPr dirty="0" err="1"/>
-              <a:t>mémento</a:t>
+              <a:t>écrire</a:t>
             </a:r>
             <a:r>
               <a:rPr dirty="0"/>
@@ -4959,43 +4850,47 @@
             </a:r>
             <a:r>
               <a:rPr dirty="0" err="1"/>
-              <a:t>rassemble</a:t>
-            </a:r>
-            <a:r>
-              <a:rPr dirty="0"/>
-              <a:t> 37 </a:t>
-            </a:r>
-            <a:r>
-              <a:rPr dirty="0" err="1"/>
-              <a:t>règles</a:t>
-            </a:r>
-            <a:r>
-              <a:rPr dirty="0"/>
-              <a:t> simples pour </a:t>
-            </a:r>
-            <a:r>
-              <a:rPr dirty="0" err="1"/>
-              <a:t>écrire</a:t>
-            </a:r>
-            <a:r>
-              <a:rPr dirty="0"/>
-              <a:t> du code </a:t>
-            </a:r>
-            <a:r>
-              <a:rPr dirty="0" err="1"/>
-              <a:t>qu</a:t>
-            </a:r>
-            <a:r>
-              <a:rPr lang="fr-BE" dirty="0"/>
-              <a:t>'</a:t>
-            </a:r>
-            <a:r>
-              <a:rPr dirty="0"/>
-              <a:t>un </a:t>
-            </a:r>
-            <a:r>
-              <a:rPr dirty="0" err="1"/>
-              <a:t>autre</a:t>
+              <a:t>vos</a:t>
+            </a:r>
+            <a:r>
+              <a:rPr dirty="0"/>
+              <a:t> premiers </a:t>
+            </a:r>
+            <a:r>
+              <a:rPr dirty="0" err="1"/>
+              <a:t>programmes</a:t>
+            </a:r>
+            <a:r>
+              <a:rPr dirty="0"/>
+              <a:t> sans le lire, </a:t>
+            </a:r>
+            <a:r>
+              <a:rPr dirty="0" err="1"/>
+              <a:t>mais</a:t>
+            </a:r>
+            <a:r>
+              <a:rPr dirty="0"/>
+              <a:t> il </a:t>
+            </a:r>
+            <a:r>
+              <a:rPr dirty="0" err="1"/>
+              <a:t>répond</a:t>
+            </a:r>
+            <a:r>
+              <a:rPr dirty="0"/>
+              <a:t> à la </a:t>
+            </a:r>
+            <a:r>
+              <a:rPr dirty="0" err="1"/>
+              <a:t>plupart</a:t>
+            </a:r>
+            <a:r>
+              <a:rPr dirty="0"/>
+              <a:t> des « </a:t>
+            </a:r>
+            <a:r>
+              <a:rPr dirty="0" err="1"/>
+              <a:t>pourquoi</a:t>
             </a:r>
             <a:r>
               <a:rPr dirty="0"/>
@@ -5003,75 +4898,7 @@
             </a:r>
             <a:r>
               <a:rPr dirty="0" err="1"/>
-              <a:t>développeur</a:t>
-            </a:r>
-            <a:r>
-              <a:rPr dirty="0"/>
-              <a:t>, </a:t>
-            </a:r>
-            <a:r>
-              <a:rPr dirty="0" err="1"/>
-              <a:t>ou</a:t>
-            </a:r>
-            <a:r>
-              <a:rPr dirty="0"/>
-              <a:t> vous-</a:t>
-            </a:r>
-            <a:r>
-              <a:rPr dirty="0" err="1"/>
-              <a:t>même</a:t>
-            </a:r>
-            <a:r>
-              <a:rPr dirty="0"/>
-              <a:t> dans six </a:t>
-            </a:r>
-            <a:r>
-              <a:rPr dirty="0" err="1"/>
-              <a:t>mois</a:t>
-            </a:r>
-            <a:r>
-              <a:rPr dirty="0"/>
-              <a:t>, </a:t>
-            </a:r>
-            <a:r>
-              <a:rPr dirty="0" err="1"/>
-              <a:t>comprendra</a:t>
-            </a:r>
-            <a:r>
-              <a:rPr dirty="0"/>
-              <a:t> sans effort. Elles s</a:t>
-            </a:r>
-            <a:r>
-              <a:rPr lang="fr-BE" dirty="0"/>
-              <a:t>'</a:t>
-            </a:r>
-            <a:r>
-              <a:rPr dirty="0" err="1"/>
-              <a:t>inspirent</a:t>
-            </a:r>
-            <a:r>
-              <a:rPr dirty="0"/>
-              <a:t> du livre de Robert C. Martin ; la </a:t>
-            </a:r>
-            <a:r>
-              <a:rPr dirty="0" err="1"/>
-              <a:t>rubrique</a:t>
-            </a:r>
-            <a:r>
-              <a:rPr dirty="0"/>
-              <a:t> « Pour </a:t>
-            </a:r>
-            <a:r>
-              <a:rPr dirty="0" err="1"/>
-              <a:t>aller</a:t>
-            </a:r>
-            <a:r>
-              <a:rPr dirty="0"/>
-              <a:t> plus loin » propose </a:t>
-            </a:r>
-            <a:r>
-              <a:rPr dirty="0" err="1"/>
-              <a:t>aussi</a:t>
+              <a:t>ça</a:t>
             </a:r>
             <a:r>
               <a:rPr dirty="0"/>
@@ -5079,113 +4906,11 @@
             </a:r>
             <a:r>
               <a:rPr dirty="0" err="1"/>
-              <a:t>une</a:t>
-            </a:r>
-            <a:r>
-              <a:rPr dirty="0"/>
-              <a:t> </a:t>
-            </a:r>
-            <a:r>
-              <a:rPr dirty="0" err="1"/>
-              <a:t>vidéo</a:t>
-            </a:r>
-            <a:r>
-              <a:rPr dirty="0"/>
-              <a:t> </a:t>
-            </a:r>
-            <a:r>
-              <a:rPr dirty="0" err="1"/>
-              <a:t>en</a:t>
-            </a:r>
-            <a:r>
-              <a:rPr dirty="0"/>
-              <a:t> français de Julien Lucas.</a:t>
-            </a:r>
-          </a:p>
-          <a:p>
-            <a:r>
-              <a:rPr dirty="0" err="1"/>
-              <a:t>Ces</a:t>
-            </a:r>
-            <a:r>
-              <a:rPr dirty="0"/>
-              <a:t> </a:t>
-            </a:r>
-            <a:r>
-              <a:rPr dirty="0" err="1"/>
-              <a:t>règles</a:t>
-            </a:r>
-            <a:r>
-              <a:rPr dirty="0"/>
-              <a:t> ne font pas l</a:t>
-            </a:r>
-            <a:r>
-              <a:rPr lang="fr-BE" dirty="0"/>
-              <a:t>'</a:t>
-            </a:r>
-            <a:r>
-              <a:rPr dirty="0" err="1"/>
-              <a:t>objet</a:t>
-            </a:r>
-            <a:r>
-              <a:rPr dirty="0"/>
-              <a:t> d</a:t>
-            </a:r>
-            <a:r>
-              <a:rPr lang="fr-BE" dirty="0"/>
-              <a:t>'</a:t>
-            </a:r>
-            <a:r>
-              <a:rPr dirty="0"/>
-              <a:t>un module. Elles </a:t>
-            </a:r>
-            <a:r>
-              <a:rPr dirty="0" err="1"/>
-              <a:t>arrivent</a:t>
-            </a:r>
-            <a:r>
-              <a:rPr dirty="0"/>
-              <a:t> par petites touches, au fil des </a:t>
-            </a:r>
-            <a:r>
-              <a:rPr dirty="0" err="1"/>
-              <a:t>exercices</a:t>
-            </a:r>
-            <a:r>
-              <a:rPr dirty="0"/>
-              <a:t>, </a:t>
-            </a:r>
-            <a:r>
-              <a:rPr dirty="0" err="1"/>
-              <a:t>quand</a:t>
-            </a:r>
-            <a:r>
-              <a:rPr dirty="0"/>
-              <a:t> </a:t>
-            </a:r>
-            <a:r>
-              <a:rPr dirty="0" err="1"/>
-              <a:t>elles</a:t>
-            </a:r>
-            <a:r>
-              <a:rPr dirty="0"/>
-              <a:t> </a:t>
-            </a:r>
-            <a:r>
-              <a:rPr dirty="0" err="1"/>
-              <a:t>deviennent</a:t>
-            </a:r>
-            <a:r>
-              <a:rPr dirty="0"/>
-              <a:t> </a:t>
-            </a:r>
-            <a:r>
-              <a:rPr dirty="0" err="1"/>
-              <a:t>utiles</a:t>
-            </a:r>
-            <a:r>
-              <a:rPr dirty="0"/>
-              <a:t>.</a:t>
+              <a:t>marche</a:t>
+            </a:r>
+            <a:r>
+              <a:rPr dirty="0"/>
+              <a:t> ? ».</a:t>
             </a:r>
           </a:p>
         </p:txBody>
@@ -5256,111 +4981,103 @@
           <a:p>
             <a:r>
               <a:rPr dirty="0"/>
-              <a:t>Les fascicules et les slides </a:t>
-            </a:r>
-            <a:r>
-              <a:rPr dirty="0" err="1"/>
-              <a:t>renvoient</a:t>
-            </a:r>
-            <a:r>
-              <a:rPr dirty="0"/>
-              <a:t> aux </a:t>
-            </a:r>
-            <a:r>
-              <a:rPr dirty="0" err="1"/>
-              <a:t>mémentos</a:t>
-            </a:r>
-            <a:r>
-              <a:rPr dirty="0"/>
-              <a:t> par </a:t>
-            </a:r>
-            <a:r>
-              <a:rPr dirty="0" err="1"/>
-              <a:t>ces</a:t>
-            </a:r>
-            <a:r>
-              <a:rPr dirty="0"/>
-              <a:t> codes. Par </a:t>
-            </a:r>
-            <a:r>
-              <a:rPr dirty="0" err="1"/>
-              <a:t>exemple</a:t>
-            </a:r>
-            <a:r>
-              <a:rPr dirty="0"/>
-              <a:t>, l</a:t>
+              <a:t>Un </a:t>
+            </a:r>
+            <a:r>
+              <a:rPr dirty="0" err="1"/>
+              <a:t>programme</a:t>
+            </a:r>
+            <a:r>
+              <a:rPr dirty="0"/>
+              <a:t> qui </a:t>
+            </a:r>
+            <a:r>
+              <a:rPr dirty="0" err="1"/>
+              <a:t>fonctionne</a:t>
+            </a:r>
+            <a:r>
+              <a:rPr dirty="0"/>
+              <a:t> n</a:t>
             </a:r>
             <a:r>
               <a:rPr lang="fr-BE" dirty="0"/>
               <a:t>'</a:t>
             </a:r>
             <a:r>
-              <a:rPr dirty="0" err="1"/>
-              <a:t>exercice</a:t>
+              <a:rPr dirty="0"/>
+              <a:t>est pas </a:t>
+            </a:r>
+            <a:r>
+              <a:rPr dirty="0" err="1"/>
+              <a:t>forcément</a:t>
+            </a:r>
+            <a:r>
+              <a:rPr dirty="0"/>
+              <a:t> un </a:t>
+            </a:r>
+            <a:r>
+              <a:rPr dirty="0" err="1"/>
+              <a:t>programme</a:t>
             </a:r>
             <a:r>
               <a:rPr dirty="0"/>
               <a:t> </a:t>
             </a:r>
             <a:r>
-              <a:rPr dirty="0">
-                <a:latin typeface="Consolas"/>
-              </a:rPr>
-              <a:t>POO.5</a:t>
-            </a:r>
-            <a:r>
-              <a:rPr dirty="0"/>
-              <a:t> vous </a:t>
-            </a:r>
-            <a:r>
-              <a:rPr dirty="0" err="1"/>
-              <a:t>demande</a:t>
-            </a:r>
-            <a:r>
-              <a:rPr dirty="0"/>
-              <a:t> de lire </a:t>
-            </a:r>
-            <a:r>
-              <a:rPr dirty="0" err="1"/>
-              <a:t>une</a:t>
-            </a:r>
-            <a:r>
-              <a:rPr dirty="0"/>
-              <a:t> Javadoc : il vous </a:t>
-            </a:r>
-            <a:r>
-              <a:rPr dirty="0" err="1"/>
-              <a:t>renvoie</a:t>
-            </a:r>
-            <a:r>
-              <a:rPr dirty="0"/>
-              <a:t> à </a:t>
-            </a:r>
-            <a:r>
-              <a:rPr dirty="0">
-                <a:latin typeface="Consolas"/>
-              </a:rPr>
-              <a:t>IDE.14</a:t>
-            </a:r>
-            <a:r>
-              <a:rPr dirty="0"/>
-              <a:t>, qui montre comment l</a:t>
+              <a:rPr dirty="0" err="1"/>
+              <a:t>lisible</a:t>
+            </a:r>
+            <a:r>
+              <a:rPr dirty="0"/>
+              <a:t>. Le </a:t>
+            </a:r>
+            <a:r>
+              <a:rPr dirty="0" err="1"/>
+              <a:t>mémento</a:t>
+            </a:r>
+            <a:r>
+              <a:rPr dirty="0"/>
+              <a:t> </a:t>
+            </a:r>
+            <a:r>
+              <a:rPr dirty="0" err="1"/>
+              <a:t>rassemble</a:t>
+            </a:r>
+            <a:r>
+              <a:rPr dirty="0"/>
+              <a:t> 37 </a:t>
+            </a:r>
+            <a:r>
+              <a:rPr dirty="0" err="1"/>
+              <a:t>règles</a:t>
+            </a:r>
+            <a:r>
+              <a:rPr dirty="0"/>
+              <a:t> simples pour </a:t>
+            </a:r>
+            <a:r>
+              <a:rPr dirty="0" err="1"/>
+              <a:t>écrire</a:t>
+            </a:r>
+            <a:r>
+              <a:rPr dirty="0"/>
+              <a:t> du code </a:t>
+            </a:r>
+            <a:r>
+              <a:rPr dirty="0" err="1"/>
+              <a:t>qu</a:t>
             </a:r>
             <a:r>
               <a:rPr lang="fr-BE" dirty="0"/>
               <a:t>'</a:t>
             </a:r>
             <a:r>
-              <a:rPr dirty="0" err="1"/>
-              <a:t>afficher</a:t>
-            </a:r>
-            <a:r>
-              <a:rPr dirty="0"/>
-              <a:t> sans quitter IntelliJ. Le module POO vous </a:t>
-            </a:r>
-            <a:r>
-              <a:rPr dirty="0" err="1"/>
-              <a:t>renvoie</a:t>
+              <a:rPr dirty="0"/>
+              <a:t>un </a:t>
+            </a:r>
+            <a:r>
+              <a:rPr dirty="0" err="1"/>
+              <a:t>autre</a:t>
             </a:r>
             <a:r>
               <a:rPr dirty="0"/>
@@ -5368,37 +5085,11 @@
             </a:r>
             <a:r>
               <a:rPr dirty="0" err="1"/>
-              <a:t>aussi</a:t>
-            </a:r>
-            <a:r>
-              <a:rPr dirty="0"/>
-              <a:t> à </a:t>
-            </a:r>
-            <a:r>
-              <a:rPr dirty="0">
-                <a:latin typeface="Consolas"/>
-              </a:rPr>
-              <a:t>CC-MET.8</a:t>
-            </a:r>
-            <a:r>
-              <a:rPr dirty="0"/>
-              <a:t> : </a:t>
-            </a:r>
-            <a:r>
-              <a:rPr dirty="0" err="1"/>
-              <a:t>une</a:t>
-            </a:r>
-            <a:r>
-              <a:rPr dirty="0"/>
-              <a:t> </a:t>
-            </a:r>
-            <a:r>
-              <a:rPr dirty="0" err="1"/>
-              <a:t>méthode</a:t>
-            </a:r>
-            <a:r>
-              <a:rPr dirty="0"/>
-              <a:t> agit </a:t>
+              <a:t>développeur</a:t>
+            </a:r>
+            <a:r>
+              <a:rPr dirty="0"/>
+              <a:t>, </a:t>
             </a:r>
             <a:r>
               <a:rPr dirty="0" err="1"/>
@@ -5406,49 +5097,173 @@
             </a:r>
             <a:r>
               <a:rPr dirty="0"/>
-              <a:t> </a:t>
-            </a:r>
-            <a:r>
-              <a:rPr dirty="0" err="1"/>
-              <a:t>répond</a:t>
-            </a:r>
-            <a:r>
-              <a:rPr dirty="0"/>
-              <a:t>, jamais les deux.</a:t>
-            </a:r>
-          </a:p>
-          <a:p>
-            <a:r>
-              <a:rPr dirty="0"/>
-              <a:t>Le premier renvoi arrive </a:t>
-            </a:r>
-            <a:r>
-              <a:rPr dirty="0" err="1"/>
-              <a:t>dès</a:t>
-            </a:r>
-            <a:r>
-              <a:rPr dirty="0"/>
-              <a:t> le module POO. </a:t>
-            </a:r>
-            <a:r>
-              <a:rPr dirty="0" err="1"/>
-              <a:t>Prenez</a:t>
-            </a:r>
-            <a:r>
-              <a:rPr dirty="0"/>
-              <a:t> l</a:t>
+              <a:t> vous-</a:t>
+            </a:r>
+            <a:r>
+              <a:rPr dirty="0" err="1"/>
+              <a:t>même</a:t>
+            </a:r>
+            <a:r>
+              <a:rPr dirty="0"/>
+              <a:t> dans six </a:t>
+            </a:r>
+            <a:r>
+              <a:rPr dirty="0" err="1"/>
+              <a:t>mois</a:t>
+            </a:r>
+            <a:r>
+              <a:rPr dirty="0"/>
+              <a:t>, </a:t>
+            </a:r>
+            <a:r>
+              <a:rPr dirty="0" err="1"/>
+              <a:t>comprendra</a:t>
+            </a:r>
+            <a:r>
+              <a:rPr dirty="0"/>
+              <a:t> sans effort. Elles s</a:t>
             </a:r>
             <a:r>
               <a:rPr lang="fr-BE" dirty="0"/>
               <a:t>'</a:t>
             </a:r>
             <a:r>
-              <a:rPr dirty="0"/>
-              <a:t>habitude de le </a:t>
-            </a:r>
-            <a:r>
-              <a:rPr dirty="0" err="1"/>
-              <a:t>suivre</a:t>
+              <a:rPr dirty="0" err="1"/>
+              <a:t>inspirent</a:t>
+            </a:r>
+            <a:r>
+              <a:rPr dirty="0"/>
+              <a:t> du livre de Robert C. Martin ; la </a:t>
+            </a:r>
+            <a:r>
+              <a:rPr dirty="0" err="1"/>
+              <a:t>rubrique</a:t>
+            </a:r>
+            <a:r>
+              <a:rPr dirty="0"/>
+              <a:t> « Pour </a:t>
+            </a:r>
+            <a:r>
+              <a:rPr dirty="0" err="1"/>
+              <a:t>aller</a:t>
+            </a:r>
+            <a:r>
+              <a:rPr dirty="0"/>
+              <a:t> plus loin » propose </a:t>
+            </a:r>
+            <a:r>
+              <a:rPr dirty="0" err="1"/>
+              <a:t>aussi</a:t>
+            </a:r>
+            <a:r>
+              <a:rPr dirty="0"/>
+              <a:t> </a:t>
+            </a:r>
+            <a:r>
+              <a:rPr dirty="0" err="1"/>
+              <a:t>une</a:t>
+            </a:r>
+            <a:r>
+              <a:rPr dirty="0"/>
+              <a:t> </a:t>
+            </a:r>
+            <a:r>
+              <a:rPr dirty="0" err="1"/>
+              <a:t>vidéo</a:t>
+            </a:r>
+            <a:r>
+              <a:rPr dirty="0"/>
+              <a:t> </a:t>
+            </a:r>
+            <a:r>
+              <a:rPr dirty="0" err="1"/>
+              <a:t>en</a:t>
+            </a:r>
+            <a:r>
+              <a:rPr dirty="0"/>
+              <a:t> français de Julien Lucas.</a:t>
+            </a:r>
+          </a:p>
+          <a:p>
+            <a:r>
+              <a:rPr dirty="0" err="1"/>
+              <a:t>Ces</a:t>
+            </a:r>
+            <a:r>
+              <a:rPr dirty="0"/>
+              <a:t> </a:t>
+            </a:r>
+            <a:r>
+              <a:rPr dirty="0" err="1"/>
+              <a:t>règles</a:t>
+            </a:r>
+            <a:r>
+              <a:rPr dirty="0"/>
+              <a:t> ne font pas l</a:t>
+            </a:r>
+            <a:r>
+              <a:rPr lang="fr-BE" dirty="0"/>
+              <a:t>'</a:t>
+            </a:r>
+            <a:r>
+              <a:rPr dirty="0" err="1"/>
+              <a:t>objet</a:t>
+            </a:r>
+            <a:r>
+              <a:rPr dirty="0"/>
+              <a:t> d</a:t>
+            </a:r>
+            <a:r>
+              <a:rPr lang="fr-BE" dirty="0"/>
+              <a:t>'</a:t>
+            </a:r>
+            <a:r>
+              <a:rPr dirty="0"/>
+              <a:t>un module. Elles </a:t>
+            </a:r>
+            <a:r>
+              <a:rPr dirty="0" err="1"/>
+              <a:t>arrivent</a:t>
+            </a:r>
+            <a:r>
+              <a:rPr dirty="0"/>
+              <a:t> par petites touches, au fil des </a:t>
+            </a:r>
+            <a:r>
+              <a:rPr dirty="0" err="1"/>
+              <a:t>exercices</a:t>
+            </a:r>
+            <a:r>
+              <a:rPr dirty="0"/>
+              <a:t>, </a:t>
+            </a:r>
+            <a:r>
+              <a:rPr dirty="0" err="1"/>
+              <a:t>quand</a:t>
+            </a:r>
+            <a:r>
+              <a:rPr dirty="0"/>
+              <a:t> </a:t>
+            </a:r>
+            <a:r>
+              <a:rPr dirty="0" err="1"/>
+              <a:t>elles</a:t>
+            </a:r>
+            <a:r>
+              <a:rPr dirty="0"/>
+              <a:t> </a:t>
+            </a:r>
+            <a:r>
+              <a:rPr dirty="0" err="1"/>
+              <a:t>deviennent</a:t>
+            </a:r>
+            <a:r>
+              <a:rPr dirty="0"/>
+              <a:t> </a:t>
+            </a:r>
+            <a:r>
+              <a:rPr dirty="0" err="1"/>
+              <a:t>utiles</a:t>
             </a:r>
             <a:r>
               <a:rPr dirty="0"/>
@@ -5523,87 +5338,95 @@
           <a:p>
             <a:r>
               <a:rPr dirty="0"/>
-              <a:t>La documentation </a:t>
-            </a:r>
-            <a:r>
-              <a:rPr dirty="0" err="1"/>
-              <a:t>officielle</a:t>
-            </a:r>
-            <a:r>
-              <a:rPr dirty="0"/>
-              <a:t> de Java, et </a:t>
-            </a:r>
-            <a:r>
-              <a:rPr dirty="0" err="1"/>
-              <a:t>notamment</a:t>
-            </a:r>
-            <a:r>
-              <a:rPr dirty="0"/>
-              <a:t> la Javadoc qui </a:t>
-            </a:r>
-            <a:r>
-              <a:rPr dirty="0" err="1"/>
-              <a:t>décrit</a:t>
-            </a:r>
-            <a:r>
-              <a:rPr dirty="0"/>
-              <a:t> </a:t>
-            </a:r>
-            <a:r>
-              <a:rPr dirty="0" err="1"/>
-              <a:t>chaque</a:t>
-            </a:r>
-            <a:r>
-              <a:rPr dirty="0"/>
-              <a:t> </a:t>
-            </a:r>
-            <a:r>
-              <a:rPr dirty="0" err="1"/>
-              <a:t>classe</a:t>
-            </a:r>
-            <a:r>
-              <a:rPr dirty="0"/>
-              <a:t> de la bibliothèque standard, se </a:t>
-            </a:r>
-            <a:r>
-              <a:rPr dirty="0" err="1"/>
-              <a:t>trouve</a:t>
-            </a:r>
-            <a:r>
-              <a:rPr dirty="0"/>
-              <a:t> sur le site d</a:t>
+              <a:t>Les fascicules et les slides </a:t>
+            </a:r>
+            <a:r>
+              <a:rPr dirty="0" err="1"/>
+              <a:t>renvoient</a:t>
+            </a:r>
+            <a:r>
+              <a:rPr dirty="0"/>
+              <a:t> aux </a:t>
+            </a:r>
+            <a:r>
+              <a:rPr dirty="0" err="1"/>
+              <a:t>mémentos</a:t>
+            </a:r>
+            <a:r>
+              <a:rPr dirty="0"/>
+              <a:t> par </a:t>
+            </a:r>
+            <a:r>
+              <a:rPr dirty="0" err="1"/>
+              <a:t>ces</a:t>
+            </a:r>
+            <a:r>
+              <a:rPr dirty="0"/>
+              <a:t> codes. Par </a:t>
+            </a:r>
+            <a:r>
+              <a:rPr dirty="0" err="1"/>
+              <a:t>exemple</a:t>
+            </a:r>
+            <a:r>
+              <a:rPr dirty="0"/>
+              <a:t>, l</a:t>
             </a:r>
             <a:r>
               <a:rPr lang="fr-BE" dirty="0"/>
               <a:t>'</a:t>
             </a:r>
             <a:r>
-              <a:rPr dirty="0"/>
-              <a:t>Oracle. </a:t>
-            </a:r>
-            <a:r>
-              <a:rPr dirty="0" err="1"/>
-              <a:t>Choisissez</a:t>
-            </a:r>
-            <a:r>
-              <a:rPr dirty="0"/>
-              <a:t> la version de Java </a:t>
-            </a:r>
-            <a:r>
-              <a:rPr dirty="0" err="1"/>
-              <a:t>annoncée</a:t>
-            </a:r>
-            <a:r>
-              <a:rPr dirty="0"/>
-              <a:t> sur Moodle : les classes </a:t>
-            </a:r>
-            <a:r>
-              <a:rPr dirty="0" err="1"/>
-              <a:t>évoluent</a:t>
-            </a:r>
-            <a:r>
-              <a:rPr dirty="0"/>
-              <a:t> d</a:t>
+              <a:rPr dirty="0" err="1"/>
+              <a:t>exercice</a:t>
+            </a:r>
+            <a:r>
+              <a:rPr dirty="0"/>
+              <a:t> </a:t>
+            </a:r>
+            <a:r>
+              <a:rPr dirty="0">
+                <a:latin typeface="Consolas"/>
+              </a:rPr>
+              <a:t>POO.5</a:t>
+            </a:r>
+            <a:r>
+              <a:rPr dirty="0"/>
+              <a:t> vous </a:t>
+            </a:r>
+            <a:r>
+              <a:rPr dirty="0" err="1"/>
+              <a:t>demande</a:t>
+            </a:r>
+            <a:r>
+              <a:rPr dirty="0"/>
+              <a:t> de lire </a:t>
+            </a:r>
+            <a:r>
+              <a:rPr dirty="0" err="1"/>
+              <a:t>une</a:t>
+            </a:r>
+            <a:r>
+              <a:rPr dirty="0"/>
+              <a:t> Javadoc : il vous </a:t>
+            </a:r>
+            <a:r>
+              <a:rPr dirty="0" err="1"/>
+              <a:t>renvoie</a:t>
+            </a:r>
+            <a:r>
+              <a:rPr dirty="0"/>
+              <a:t> à </a:t>
+            </a:r>
+            <a:r>
+              <a:rPr dirty="0">
+                <a:latin typeface="Consolas"/>
+              </a:rPr>
+              <a:t>IDE.14</a:t>
+            </a:r>
+            <a:r>
+              <a:rPr dirty="0"/>
+              <a:t>, qui montre comment l</a:t>
             </a:r>
             <a:r>
               <a:rPr lang="fr-BE" dirty="0"/>
@@ -5611,69 +5434,107 @@
             </a:r>
             <a:r>
               <a:rPr dirty="0" err="1"/>
+              <a:t>afficher</a:t>
+            </a:r>
+            <a:r>
+              <a:rPr dirty="0"/>
+              <a:t> sans quitter IntelliJ. Le module POO vous </a:t>
+            </a:r>
+            <a:r>
+              <a:rPr dirty="0" err="1"/>
+              <a:t>renvoie</a:t>
+            </a:r>
+            <a:r>
+              <a:rPr dirty="0"/>
+              <a:t> </a:t>
+            </a:r>
+            <a:r>
+              <a:rPr dirty="0" err="1"/>
+              <a:t>aussi</a:t>
+            </a:r>
+            <a:r>
+              <a:rPr dirty="0"/>
+              <a:t> à </a:t>
+            </a:r>
+            <a:r>
+              <a:rPr dirty="0">
+                <a:latin typeface="Consolas"/>
+              </a:rPr>
+              <a:t>CC-MET.8</a:t>
+            </a:r>
+            <a:r>
+              <a:rPr dirty="0"/>
+              <a:t> : </a:t>
+            </a:r>
+            <a:r>
+              <a:rPr dirty="0" err="1"/>
               <a:t>une</a:t>
             </a:r>
             <a:r>
               <a:rPr dirty="0"/>
-              <a:t> version à l</a:t>
+              <a:t> </a:t>
+            </a:r>
+            <a:r>
+              <a:rPr dirty="0" err="1"/>
+              <a:t>méthode</a:t>
+            </a:r>
+            <a:r>
+              <a:rPr dirty="0"/>
+              <a:t> agit </a:t>
+            </a:r>
+            <a:r>
+              <a:rPr dirty="0" err="1"/>
+              <a:t>ou</a:t>
+            </a:r>
+            <a:r>
+              <a:rPr dirty="0"/>
+              <a:t> </a:t>
+            </a:r>
+            <a:r>
+              <a:rPr dirty="0" err="1"/>
+              <a:t>répond</a:t>
+            </a:r>
+            <a:r>
+              <a:rPr dirty="0"/>
+              <a:t>, jamais les deux.</a:t>
+            </a:r>
+          </a:p>
+          <a:p>
+            <a:r>
+              <a:rPr dirty="0"/>
+              <a:t>Le premier renvoi arrive </a:t>
+            </a:r>
+            <a:r>
+              <a:rPr dirty="0" err="1"/>
+              <a:t>dès</a:t>
+            </a:r>
+            <a:r>
+              <a:rPr dirty="0"/>
+              <a:t> le module POO. </a:t>
+            </a:r>
+            <a:r>
+              <a:rPr dirty="0" err="1"/>
+              <a:t>Prenez</a:t>
+            </a:r>
+            <a:r>
+              <a:rPr dirty="0"/>
+              <a:t> l</a:t>
             </a:r>
             <a:r>
               <a:rPr lang="fr-BE" dirty="0"/>
               <a:t>'</a:t>
             </a:r>
             <a:r>
-              <a:rPr dirty="0" err="1"/>
-              <a:t>autre</a:t>
+              <a:rPr dirty="0"/>
+              <a:t>habitude de le </a:t>
+            </a:r>
+            <a:r>
+              <a:rPr dirty="0" err="1"/>
+              <a:t>suivre</a:t>
             </a:r>
             <a:r>
               <a:rPr dirty="0"/>
               <a:t>.</a:t>
-            </a:r>
-          </a:p>
-          <a:p>
-            <a:r>
-              <a:rPr dirty="0"/>
-              <a:t>Le site de Jean-Michel </a:t>
-            </a:r>
-            <a:r>
-              <a:rPr dirty="0" err="1"/>
-              <a:t>Doudoux</a:t>
-            </a:r>
-            <a:r>
-              <a:rPr dirty="0"/>
-              <a:t> propose </a:t>
-            </a:r>
-            <a:r>
-              <a:rPr dirty="0" err="1"/>
-              <a:t>en</a:t>
-            </a:r>
-            <a:r>
-              <a:rPr dirty="0"/>
-              <a:t> français un tour très </a:t>
-            </a:r>
-            <a:r>
-              <a:rPr dirty="0" err="1"/>
-              <a:t>complet</a:t>
-            </a:r>
-            <a:r>
-              <a:rPr dirty="0"/>
-              <a:t> du </a:t>
-            </a:r>
-            <a:r>
-              <a:rPr dirty="0" err="1"/>
-              <a:t>langage</a:t>
-            </a:r>
-            <a:r>
-              <a:rPr dirty="0"/>
-              <a:t> et de </a:t>
-            </a:r>
-            <a:r>
-              <a:rPr dirty="0" err="1"/>
-              <a:t>sa</a:t>
-            </a:r>
-            <a:r>
-              <a:rPr dirty="0"/>
-              <a:t> bibliothèque.</a:t>
             </a:r>
           </a:p>
         </p:txBody>
@@ -5699,6 +5560,227 @@
 </file>
 
 <file path=ppt/notesSlides/notesSlide26.xml><?xml version="1.0" encoding="utf-8"?>
+<p:notes xmlns:a="http://schemas.openxmlformats.org/drawingml/2006/main" xmlns:r="http://schemas.openxmlformats.org/officeDocument/2006/relationships" xmlns:p="http://schemas.openxmlformats.org/presentationml/2006/main">
+  <p:cSld>
+    <p:spTree>
+      <p:nvGrpSpPr>
+        <p:cNvPr id="1" name=""/>
+        <p:cNvGrpSpPr/>
+        <p:nvPr/>
+      </p:nvGrpSpPr>
+      <p:grpSpPr>
+        <a:xfrm>
+          <a:off x="0" y="0"/>
+          <a:ext cx="0" cy="0"/>
+          <a:chOff x="0" y="0"/>
+          <a:chExt cx="0" cy="0"/>
+        </a:xfrm>
+      </p:grpSpPr>
+      <p:sp>
+        <p:nvSpPr>
+          <p:cNvPr id="2" name="Slide Image Placeholder 1"/>
+          <p:cNvSpPr>
+            <a:spLocks noGrp="1" noRot="1" noChangeAspect="1"/>
+          </p:cNvSpPr>
+          <p:nvPr>
+            <p:ph type="sldImg" idx="2"/>
+          </p:nvPr>
+        </p:nvSpPr>
+        <p:spPr/>
+      </p:sp>
+      <p:sp>
+        <p:nvSpPr>
+          <p:cNvPr id="3" name="Notes Placeholder 2"/>
+          <p:cNvSpPr>
+            <a:spLocks noGrp="1"/>
+          </p:cNvSpPr>
+          <p:nvPr>
+            <p:ph type="body" sz="quarter" idx="3"/>
+          </p:nvPr>
+        </p:nvSpPr>
+        <p:spPr/>
+        <p:txBody>
+          <a:bodyPr/>
+          <a:lstStyle/>
+          <a:p>
+            <a:r>
+              <a:rPr dirty="0"/>
+              <a:t>La documentation </a:t>
+            </a:r>
+            <a:r>
+              <a:rPr dirty="0" err="1"/>
+              <a:t>officielle</a:t>
+            </a:r>
+            <a:r>
+              <a:rPr dirty="0"/>
+              <a:t> de Java, et </a:t>
+            </a:r>
+            <a:r>
+              <a:rPr dirty="0" err="1"/>
+              <a:t>notamment</a:t>
+            </a:r>
+            <a:r>
+              <a:rPr dirty="0"/>
+              <a:t> la Javadoc qui </a:t>
+            </a:r>
+            <a:r>
+              <a:rPr dirty="0" err="1"/>
+              <a:t>décrit</a:t>
+            </a:r>
+            <a:r>
+              <a:rPr dirty="0"/>
+              <a:t> </a:t>
+            </a:r>
+            <a:r>
+              <a:rPr dirty="0" err="1"/>
+              <a:t>chaque</a:t>
+            </a:r>
+            <a:r>
+              <a:rPr dirty="0"/>
+              <a:t> </a:t>
+            </a:r>
+            <a:r>
+              <a:rPr dirty="0" err="1"/>
+              <a:t>classe</a:t>
+            </a:r>
+            <a:r>
+              <a:rPr dirty="0"/>
+              <a:t> de la bibliothèque standard, se </a:t>
+            </a:r>
+            <a:r>
+              <a:rPr dirty="0" err="1"/>
+              <a:t>trouve</a:t>
+            </a:r>
+            <a:r>
+              <a:rPr dirty="0"/>
+              <a:t> sur le site d</a:t>
+            </a:r>
+            <a:r>
+              <a:rPr lang="fr-BE" dirty="0"/>
+              <a:t>'</a:t>
+            </a:r>
+            <a:r>
+              <a:rPr dirty="0"/>
+              <a:t>Oracle. </a:t>
+            </a:r>
+            <a:r>
+              <a:rPr dirty="0" err="1"/>
+              <a:t>Choisissez</a:t>
+            </a:r>
+            <a:r>
+              <a:rPr dirty="0"/>
+              <a:t> la version de Java </a:t>
+            </a:r>
+            <a:r>
+              <a:rPr dirty="0" err="1"/>
+              <a:t>annoncée</a:t>
+            </a:r>
+            <a:r>
+              <a:rPr dirty="0"/>
+              <a:t> sur Moodle : les classes </a:t>
+            </a:r>
+            <a:r>
+              <a:rPr dirty="0" err="1"/>
+              <a:t>évoluent</a:t>
+            </a:r>
+            <a:r>
+              <a:rPr dirty="0"/>
+              <a:t> d</a:t>
+            </a:r>
+            <a:r>
+              <a:rPr lang="fr-BE" dirty="0"/>
+              <a:t>'</a:t>
+            </a:r>
+            <a:r>
+              <a:rPr dirty="0" err="1"/>
+              <a:t>une</a:t>
+            </a:r>
+            <a:r>
+              <a:rPr dirty="0"/>
+              <a:t> version à l</a:t>
+            </a:r>
+            <a:r>
+              <a:rPr lang="fr-BE" dirty="0"/>
+              <a:t>'</a:t>
+            </a:r>
+            <a:r>
+              <a:rPr dirty="0" err="1"/>
+              <a:t>autre</a:t>
+            </a:r>
+            <a:r>
+              <a:rPr dirty="0"/>
+              <a:t>.</a:t>
+            </a:r>
+          </a:p>
+          <a:p>
+            <a:r>
+              <a:rPr dirty="0"/>
+              <a:t>Le site de Jean-Michel </a:t>
+            </a:r>
+            <a:r>
+              <a:rPr dirty="0" err="1"/>
+              <a:t>Doudoux</a:t>
+            </a:r>
+            <a:r>
+              <a:rPr dirty="0"/>
+              <a:t> propose </a:t>
+            </a:r>
+            <a:r>
+              <a:rPr dirty="0" err="1"/>
+              <a:t>en</a:t>
+            </a:r>
+            <a:r>
+              <a:rPr dirty="0"/>
+              <a:t> français un tour très </a:t>
+            </a:r>
+            <a:r>
+              <a:rPr dirty="0" err="1"/>
+              <a:t>complet</a:t>
+            </a:r>
+            <a:r>
+              <a:rPr dirty="0"/>
+              <a:t> du </a:t>
+            </a:r>
+            <a:r>
+              <a:rPr dirty="0" err="1"/>
+              <a:t>langage</a:t>
+            </a:r>
+            <a:r>
+              <a:rPr dirty="0"/>
+              <a:t> et de </a:t>
+            </a:r>
+            <a:r>
+              <a:rPr dirty="0" err="1"/>
+              <a:t>sa</a:t>
+            </a:r>
+            <a:r>
+              <a:rPr dirty="0"/>
+              <a:t> bibliothèque.</a:t>
+            </a:r>
+          </a:p>
+        </p:txBody>
+      </p:sp>
+      <p:sp>
+        <p:nvSpPr>
+          <p:cNvPr id="4" name="Slide Number Placeholder 3"/>
+          <p:cNvSpPr>
+            <a:spLocks noGrp="1"/>
+          </p:cNvSpPr>
+          <p:nvPr>
+            <p:ph type="sldNum" sz="quarter" idx="5"/>
+          </p:nvPr>
+        </p:nvSpPr>
+        <p:spPr/>
+      </p:sp>
+    </p:spTree>
+  </p:cSld>
+  <p:clrMapOvr>
+    <a:masterClrMapping/>
+  </p:clrMapOvr>
+</p:notes>
+</file>
+
+<file path=ppt/notesSlides/notesSlide27.xml><?xml version="1.0" encoding="utf-8"?>
 <p:notes xmlns:a="http://schemas.openxmlformats.org/drawingml/2006/main" xmlns:r="http://schemas.openxmlformats.org/officeDocument/2006/relationships" xmlns:p="http://schemas.openxmlformats.org/presentationml/2006/main">
   <p:cSld>
     <p:spTree>
@@ -17223,7 +17305,7 @@
           <a:p>
             <a:r>
               <a:rPr sz="4000"/>
-              <a:t>Le support imprimable</a:t>
+              <a:t>Les tests de module et leurs badges</a:t>
             </a:r>
           </a:p>
         </p:txBody>
@@ -17241,7 +17323,7 @@
         <p:spPr>
           <a:xfrm>
             <a:off x="640080" y="1371600"/>
-            <a:ext cx="10881360" cy="4800600"/>
+            <a:ext cx="7406640" cy="4800600"/>
           </a:xfrm>
         </p:spPr>
         <p:txBody>
@@ -17255,30 +17337,9 @@
               <a:buNone/>
             </a:pPr>
             <a:r>
-              <a:rPr sz="2800" dirty="0"/>
-              <a:t>Les slides</a:t>
-            </a:r>
-            <a:r>
-              <a:rPr lang="nl-BE" sz="2800" dirty="0"/>
-              <a:t> sont</a:t>
-            </a:r>
-            <a:r>
-              <a:rPr sz="2800" dirty="0"/>
-              <a:t> un </a:t>
-            </a:r>
-            <a:r>
-              <a:rPr sz="2800" dirty="0" err="1"/>
-              <a:t>appui</a:t>
-            </a:r>
-            <a:r>
-              <a:rPr sz="2800" dirty="0"/>
-              <a:t> pour le </a:t>
-            </a:r>
-            <a:r>
-              <a:rPr sz="2800" dirty="0" err="1"/>
-              <a:t>cours</a:t>
-            </a:r>
-            <a:endParaRPr sz="2800" dirty="0"/>
+              <a:rPr lang="nl-BE" sz="2400" dirty="0"/>
+              <a:t>Un test par module, sur Moodle : réussi à 6 sur 8</a:t>
+            </a:r>
           </a:p>
           <a:p>
             <a:pPr marL="0" indent="0">
@@ -17288,40 +17349,8 @@
               <a:buNone/>
             </a:pPr>
             <a:r>
-              <a:rPr lang="nl-BE" sz="2800" dirty="0"/>
-              <a:t>Je vous distribue également </a:t>
-            </a:r>
-            <a:r>
-              <a:rPr lang="nl-BE" dirty="0"/>
-              <a:t>un</a:t>
-            </a:r>
-            <a:r>
-              <a:rPr sz="2800" dirty="0"/>
-              <a:t> support</a:t>
-            </a:r>
-            <a:r>
-              <a:rPr lang="nl-BE" sz="2800" dirty="0"/>
-              <a:t> de cours qui reprend</a:t>
-            </a:r>
-            <a:r>
-              <a:rPr sz="2800" dirty="0"/>
-              <a:t> la </a:t>
-            </a:r>
-            <a:r>
-              <a:rPr sz="2800" dirty="0" err="1"/>
-              <a:t>théorie</a:t>
-            </a:r>
-            <a:r>
-              <a:rPr sz="2800" dirty="0"/>
-              <a:t> </a:t>
-            </a:r>
-            <a:r>
-              <a:rPr sz="2800" dirty="0" err="1"/>
-              <a:t>rédigée</a:t>
-            </a:r>
-            <a:r>
-              <a:rPr sz="2800" dirty="0"/>
-              <a:t>, avec le code</a:t>
+              <a:rPr lang="nl-BE" sz="2400" dirty="0"/>
+              <a:t>Tentatives illimitées ; les questions changent</a:t>
             </a:r>
           </a:p>
           <a:p>
@@ -17332,28 +17361,32 @@
               <a:buNone/>
             </a:pPr>
             <a:r>
-              <a:rPr lang="nl-BE" sz="2800" dirty="0"/>
-              <a:t>Ce support est un</a:t>
-            </a:r>
-            <a:r>
-              <a:rPr sz="2800" dirty="0"/>
-              <a:t> document unique, </a:t>
-            </a:r>
-            <a:r>
-              <a:rPr lang="nl-BE" sz="2800" dirty="0"/>
-              <a:t>valable </a:t>
-            </a:r>
-            <a:r>
-              <a:rPr sz="2800" dirty="0"/>
-              <a:t>pour </a:t>
-            </a:r>
-            <a:r>
-              <a:rPr sz="2800" dirty="0" err="1"/>
-              <a:t>tous</a:t>
-            </a:r>
-            <a:r>
-              <a:rPr sz="2800" dirty="0"/>
-              <a:t> les modules</a:t>
+              <a:rPr lang="nl-BE" sz="2400" dirty="0"/>
+              <a:t>Une erreur ? Le test dit quoi revoir</a:t>
+            </a:r>
+          </a:p>
+          <a:p>
+            <a:pPr marL="0" indent="0">
+              <a:spcAft>
+                <a:spcPts val="800"/>
+              </a:spcAft>
+              <a:buNone/>
+            </a:pPr>
+            <a:r>
+              <a:rPr lang="nl-BE" sz="2400" dirty="0"/>
+              <a:t>Un test réussi : un badge</a:t>
+            </a:r>
+          </a:p>
+          <a:p>
+            <a:pPr marL="0" indent="0">
+              <a:spcAft>
+                <a:spcPts val="800"/>
+              </a:spcAft>
+              <a:buNone/>
+            </a:pPr>
+            <a:r>
+              <a:rPr lang="nl-BE" sz="2400" dirty="0"/>
+              <a:t>Pas de note : un encouragement, à votre rythme</a:t>
             </a:r>
           </a:p>
         </p:txBody>
@@ -17382,6 +17415,328 @@
             <a:fld id="{33C783E2-4793-4F48-A271-51A73CC37D74}" type="slidenum">
               <a:rPr lang="fr-FR" smtClean="0"/>
               <a:t>18</a:t>
+            </a:fld>
+            <a:endParaRPr lang="fr-FR"/>
+          </a:p>
+        </p:txBody>
+      </p:sp>
+      <p:sp>
+        <p:nvSpPr>
+          <p:cNvPr id="5" name="Repere de section"/>
+          <p:cNvSpPr txBox="1"/>
+          <p:nvPr/>
+        </p:nvSpPr>
+        <p:spPr>
+          <a:xfrm>
+            <a:off x="6583680" y="6382512"/>
+            <a:ext cx="4480560" cy="320040"/>
+          </a:xfrm>
+          <a:prstGeom prst="rect">
+            <a:avLst/>
+          </a:prstGeom>
+          <a:noFill/>
+        </p:spPr>
+        <p:txBody>
+          <a:bodyPr wrap="none" tIns="0" bIns="0">
+            <a:spAutoFit/>
+          </a:bodyPr>
+          <a:lstStyle/>
+          <a:p>
+            <a:pPr algn="r"/>
+            <a:r>
+              <a:rPr sz="1100">
+                <a:solidFill>
+                  <a:srgbClr val="BCBEC4"/>
+                </a:solidFill>
+              </a:rPr>
+              <a:t>INI · </a:t>
+            </a:r>
+            <a:r>
+              <a:rPr sz="1100" b="1">
+                <a:solidFill>
+                  <a:schemeClr val="accent4"/>
+                </a:solidFill>
+              </a:rPr>
+              <a:t>2. Ma façon de travailler</a:t>
+            </a:r>
+          </a:p>
+        </p:txBody>
+      </p:sp>
+      <p:pic>
+        <p:nvPicPr>
+          <p:cNvPr id="6" name="Picture 5" descr="POO.png"/>
+          <p:cNvPicPr>
+            <a:picLocks noChangeAspect="1"/>
+          </p:cNvPicPr>
+          <p:nvPr/>
+        </p:nvPicPr>
+        <p:blipFill>
+          <a:blip r:embed="rId3"/>
+          <a:stretch>
+            <a:fillRect/>
+          </a:stretch>
+        </p:blipFill>
+        <p:spPr>
+          <a:xfrm>
+            <a:off x="9022080" y="1371600"/>
+            <a:ext cx="1440180" cy="1440180"/>
+          </a:xfrm>
+          <a:prstGeom prst="rect">
+            <a:avLst/>
+          </a:prstGeom>
+        </p:spPr>
+      </p:pic>
+      <p:pic>
+        <p:nvPicPr>
+          <p:cNvPr id="7" name="Picture 6" descr="Fondations.png"/>
+          <p:cNvPicPr>
+            <a:picLocks noChangeAspect="1"/>
+          </p:cNvPicPr>
+          <p:nvPr/>
+        </p:nvPicPr>
+        <p:blipFill>
+          <a:blip r:embed="rId4"/>
+          <a:stretch>
+            <a:fillRect/>
+          </a:stretch>
+        </p:blipFill>
+        <p:spPr>
+          <a:xfrm>
+            <a:off x="9814179" y="2739771"/>
+            <a:ext cx="1440180" cy="1440180"/>
+          </a:xfrm>
+          <a:prstGeom prst="rect">
+            <a:avLst/>
+          </a:prstGeom>
+        </p:spPr>
+      </p:pic>
+      <p:pic>
+        <p:nvPicPr>
+          <p:cNvPr id="8" name="Picture 7" descr="ToutJava.png"/>
+          <p:cNvPicPr>
+            <a:picLocks noChangeAspect="1"/>
+          </p:cNvPicPr>
+          <p:nvPr/>
+        </p:nvPicPr>
+        <p:blipFill>
+          <a:blip r:embed="rId5"/>
+          <a:stretch>
+            <a:fillRect/>
+          </a:stretch>
+        </p:blipFill>
+        <p:spPr>
+          <a:xfrm>
+            <a:off x="9022080" y="4107942"/>
+            <a:ext cx="1440180" cy="1440180"/>
+          </a:xfrm>
+          <a:prstGeom prst="rect">
+            <a:avLst/>
+          </a:prstGeom>
+        </p:spPr>
+      </p:pic>
+    </p:spTree>
+  </p:cSld>
+  <p:clrMapOvr>
+    <a:masterClrMapping/>
+  </p:clrMapOvr>
+</p:sld>
+</file>
+
+<file path=ppt/slides/slide19.xml><?xml version="1.0" encoding="utf-8"?>
+<p:sld xmlns:a="http://schemas.openxmlformats.org/drawingml/2006/main" xmlns:r="http://schemas.openxmlformats.org/officeDocument/2006/relationships" xmlns:p="http://schemas.openxmlformats.org/presentationml/2006/main">
+  <p:cSld>
+    <p:spTree>
+      <p:nvGrpSpPr>
+        <p:cNvPr id="1" name=""/>
+        <p:cNvGrpSpPr/>
+        <p:nvPr/>
+      </p:nvGrpSpPr>
+      <p:grpSpPr>
+        <a:xfrm>
+          <a:off x="0" y="0"/>
+          <a:ext cx="0" cy="0"/>
+          <a:chOff x="0" y="0"/>
+          <a:chExt cx="0" cy="0"/>
+        </a:xfrm>
+      </p:grpSpPr>
+      <p:sp>
+        <p:nvSpPr>
+          <p:cNvPr id="2" name="Title 1"/>
+          <p:cNvSpPr>
+            <a:spLocks noGrp="1"/>
+          </p:cNvSpPr>
+          <p:nvPr>
+            <p:ph type="title"/>
+          </p:nvPr>
+        </p:nvSpPr>
+        <p:spPr/>
+        <p:txBody>
+          <a:bodyPr>
+            <a:noAutofit/>
+          </a:bodyPr>
+          <a:lstStyle/>
+          <a:p>
+            <a:r>
+              <a:rPr sz="4000"/>
+              <a:t>Le support imprimable</a:t>
+            </a:r>
+          </a:p>
+        </p:txBody>
+      </p:sp>
+      <p:sp>
+        <p:nvSpPr>
+          <p:cNvPr id="3" name="Content Placeholder 2"/>
+          <p:cNvSpPr>
+            <a:spLocks noGrp="1"/>
+          </p:cNvSpPr>
+          <p:nvPr>
+            <p:ph idx="1"/>
+          </p:nvPr>
+        </p:nvSpPr>
+        <p:spPr>
+          <a:xfrm>
+            <a:off x="640080" y="1371600"/>
+            <a:ext cx="10881360" cy="4800600"/>
+          </a:xfrm>
+        </p:spPr>
+        <p:txBody>
+          <a:bodyPr/>
+          <a:lstStyle/>
+          <a:p>
+            <a:pPr marL="0" indent="0">
+              <a:spcAft>
+                <a:spcPts val="800"/>
+              </a:spcAft>
+              <a:buNone/>
+            </a:pPr>
+            <a:r>
+              <a:rPr sz="2800" dirty="0"/>
+              <a:t>Les slides</a:t>
+            </a:r>
+            <a:r>
+              <a:rPr lang="nl-BE" sz="2800" dirty="0"/>
+              <a:t> sont</a:t>
+            </a:r>
+            <a:r>
+              <a:rPr sz="2800" dirty="0"/>
+              <a:t> un </a:t>
+            </a:r>
+            <a:r>
+              <a:rPr sz="2800" dirty="0" err="1"/>
+              <a:t>appui</a:t>
+            </a:r>
+            <a:r>
+              <a:rPr sz="2800" dirty="0"/>
+              <a:t> pour le </a:t>
+            </a:r>
+            <a:r>
+              <a:rPr sz="2800" dirty="0" err="1"/>
+              <a:t>cours</a:t>
+            </a:r>
+            <a:endParaRPr sz="2800" dirty="0"/>
+          </a:p>
+          <a:p>
+            <a:pPr marL="0" indent="0">
+              <a:spcAft>
+                <a:spcPts val="800"/>
+              </a:spcAft>
+              <a:buNone/>
+            </a:pPr>
+            <a:r>
+              <a:rPr lang="nl-BE" sz="2800" dirty="0"/>
+              <a:t>Je vous distribue également </a:t>
+            </a:r>
+            <a:r>
+              <a:rPr lang="nl-BE" dirty="0"/>
+              <a:t>un</a:t>
+            </a:r>
+            <a:r>
+              <a:rPr sz="2800" dirty="0"/>
+              <a:t> support</a:t>
+            </a:r>
+            <a:r>
+              <a:rPr lang="nl-BE" sz="2800" dirty="0"/>
+              <a:t> de cours qui reprend</a:t>
+            </a:r>
+            <a:r>
+              <a:rPr sz="2800" dirty="0"/>
+              <a:t> la </a:t>
+            </a:r>
+            <a:r>
+              <a:rPr sz="2800" dirty="0" err="1"/>
+              <a:t>théorie</a:t>
+            </a:r>
+            <a:r>
+              <a:rPr sz="2800" dirty="0"/>
+              <a:t> </a:t>
+            </a:r>
+            <a:r>
+              <a:rPr sz="2800" dirty="0" err="1"/>
+              <a:t>rédigée</a:t>
+            </a:r>
+            <a:r>
+              <a:rPr sz="2800" dirty="0"/>
+              <a:t>, avec le code</a:t>
+            </a:r>
+          </a:p>
+          <a:p>
+            <a:pPr marL="0" indent="0">
+              <a:spcAft>
+                <a:spcPts val="800"/>
+              </a:spcAft>
+              <a:buNone/>
+            </a:pPr>
+            <a:r>
+              <a:rPr lang="nl-BE" sz="2800" dirty="0"/>
+              <a:t>Ce support est un</a:t>
+            </a:r>
+            <a:r>
+              <a:rPr sz="2800" dirty="0"/>
+              <a:t> document unique, </a:t>
+            </a:r>
+            <a:r>
+              <a:rPr lang="nl-BE" sz="2800" dirty="0"/>
+              <a:t>valable </a:t>
+            </a:r>
+            <a:r>
+              <a:rPr sz="2800" dirty="0"/>
+              <a:t>pour </a:t>
+            </a:r>
+            <a:r>
+              <a:rPr sz="2800" dirty="0" err="1"/>
+              <a:t>tous</a:t>
+            </a:r>
+            <a:r>
+              <a:rPr sz="2800" dirty="0"/>
+              <a:t> les modules</a:t>
+            </a:r>
+          </a:p>
+        </p:txBody>
+      </p:sp>
+      <p:sp>
+        <p:nvSpPr>
+          <p:cNvPr id="4" name="Espace réservé du numéro de diapositive 3">
+            <a:extLst>
+              <a:ext uri="{FF2B5EF4-FFF2-40B4-BE49-F238E27FC236}">
+                <a16:creationId xmlns:a16="http://schemas.microsoft.com/office/drawing/2014/main" id="{54F663AF-B9DD-50FD-43D6-172C828163B5}"/>
+              </a:ext>
+            </a:extLst>
+          </p:cNvPr>
+          <p:cNvSpPr>
+            <a:spLocks noGrp="1"/>
+          </p:cNvSpPr>
+          <p:nvPr>
+            <p:ph type="sldNum" sz="quarter" idx="4"/>
+          </p:nvPr>
+        </p:nvSpPr>
+        <p:spPr/>
+        <p:txBody>
+          <a:bodyPr/>
+          <a:lstStyle/>
+          <a:p>
+            <a:fld id="{33C783E2-4793-4F48-A271-51A73CC37D74}" type="slidenum">
+              <a:rPr lang="fr-FR" smtClean="0"/>
+              <a:t>19</a:t>
             </a:fld>
             <a:endParaRPr lang="fr-FR"/>
           </a:p>
@@ -17469,248 +17824,6 @@
   <p:clrMapOvr>
     <a:masterClrMapping/>
   </p:clrMapOvr>
-</p:sld>
-</file>
-
-<file path=ppt/slides/slide19.xml><?xml version="1.0" encoding="utf-8"?>
-<p:sld xmlns:a="http://schemas.openxmlformats.org/drawingml/2006/main" xmlns:r="http://schemas.openxmlformats.org/officeDocument/2006/relationships" xmlns:p="http://schemas.openxmlformats.org/presentationml/2006/main">
-  <p:cSld>
-    <p:spTree>
-      <p:nvGrpSpPr>
-        <p:cNvPr id="1" name=""/>
-        <p:cNvGrpSpPr/>
-        <p:nvPr/>
-      </p:nvGrpSpPr>
-      <p:grpSpPr>
-        <a:xfrm>
-          <a:off x="0" y="0"/>
-          <a:ext cx="0" cy="0"/>
-          <a:chOff x="0" y="0"/>
-          <a:chExt cx="0" cy="0"/>
-        </a:xfrm>
-      </p:grpSpPr>
-      <p:pic>
-        <p:nvPicPr>
-          <p:cNvPr id="4105" name="Picture 8" descr="INI_section3.jpg"/>
-          <p:cNvPicPr>
-            <a:picLocks noChangeAspect="1"/>
-          </p:cNvPicPr>
-          <p:nvPr/>
-        </p:nvPicPr>
-        <p:blipFill>
-          <a:blip r:embed="rId3"/>
-          <a:stretch>
-            <a:fillRect/>
-          </a:stretch>
-        </p:blipFill>
-        <p:spPr>
-          <a:xfrm>
-            <a:off x="0" y="0"/>
-            <a:ext cx="12192000" cy="6858000"/>
-          </a:xfrm>
-          <a:prstGeom prst="rect">
-            <a:avLst/>
-          </a:prstGeom>
-        </p:spPr>
-      </p:pic>
-      <p:sp>
-        <p:nvSpPr>
-          <p:cNvPr id="2" name="ZoneTexte 1">
-            <a:extLst>
-              <a:ext uri="{FF2B5EF4-FFF2-40B4-BE49-F238E27FC236}">
-                <a16:creationId xmlns:a16="http://schemas.microsoft.com/office/drawing/2014/main" id="{E73067B4-4758-7D90-FE25-49374D623451}"/>
-              </a:ext>
-            </a:extLst>
-          </p:cNvPr>
-          <p:cNvSpPr txBox="1"/>
-          <p:nvPr/>
-        </p:nvSpPr>
-        <p:spPr>
-          <a:xfrm>
-            <a:off x="838200" y="946800"/>
-            <a:ext cx="6129893" cy="1105200"/>
-          </a:xfrm>
-          <a:prstGeom prst="rect">
-            <a:avLst/>
-          </a:prstGeom>
-          <a:solidFill>
-            <a:schemeClr val="bg2">
-              <a:lumMod val="50000"/>
-              <a:alpha val="74902"/>
-            </a:schemeClr>
-          </a:solidFill>
-          <a:effectLst>
-            <a:outerShdw blurRad="50800" dist="38100" dir="2700000" algn="tl" rotWithShape="0">
-              <a:prstClr val="black">
-                <a:alpha val="40000"/>
-              </a:prstClr>
-            </a:outerShdw>
-          </a:effectLst>
-        </p:spPr>
-        <p:txBody>
-          <a:bodyPr wrap="square" rtlCol="0">
-            <a:spAutoFit/>
-          </a:bodyPr>
-          <a:lstStyle/>
-          <a:p>
-            <a:r>
-              <a:rPr lang="fr-FR" sz="6600" b="1" dirty="0">
-                <a:ln w="0"/>
-                <a:effectLst>
-                  <a:outerShdw blurRad="38100" dist="19050" dir="2700000" algn="tl" rotWithShape="0">
-                    <a:schemeClr val="dk1">
-                      <a:alpha val="40000"/>
-                    </a:schemeClr>
-                  </a:outerShdw>
-                </a:effectLst>
-                <a:latin typeface="Calibri"/>
-                <a:cs typeface="Calibri"/>
-              </a:rPr>
-              <a:t>3. Les mémentos</a:t>
-            </a:r>
-            <a:endParaRPr lang="fr-FR" b="1" dirty="0">
-              <a:ln w="0"/>
-              <a:effectLst>
-                <a:outerShdw blurRad="38100" dist="19050" dir="2700000" algn="tl" rotWithShape="0">
-                  <a:schemeClr val="dk1">
-                    <a:alpha val="40000"/>
-                  </a:schemeClr>
-                </a:outerShdw>
-              </a:effectLst>
-              <a:latin typeface="Calibri" panose="020F0502020204030204" pitchFamily="34" charset="0"/>
-              <a:cs typeface="Calibri" panose="020F0502020204030204" pitchFamily="34" charset="0"/>
-            </a:endParaRPr>
-          </a:p>
-        </p:txBody>
-      </p:sp>
-      <p:sp>
-        <p:nvSpPr>
-          <p:cNvPr id="3" name="Espace réservé du numéro de diapositive 2">
-            <a:extLst>
-              <a:ext uri="{FF2B5EF4-FFF2-40B4-BE49-F238E27FC236}">
-                <a16:creationId xmlns:a16="http://schemas.microsoft.com/office/drawing/2014/main" id="{3918A127-4A9F-4E38-ECD2-0153C0A2B766}"/>
-              </a:ext>
-            </a:extLst>
-          </p:cNvPr>
-          <p:cNvSpPr>
-            <a:spLocks noGrp="1"/>
-          </p:cNvSpPr>
-          <p:nvPr>
-            <p:ph type="sldNum" sz="quarter" idx="4"/>
-          </p:nvPr>
-        </p:nvSpPr>
-        <p:spPr/>
-        <p:txBody>
-          <a:bodyPr/>
-          <a:lstStyle/>
-          <a:p>
-            <a:fld id="{33C783E2-4793-4F48-A271-51A73CC37D74}" type="slidenum">
-              <a:rPr lang="fr-FR" smtClean="0"/>
-              <a:t>19</a:t>
-            </a:fld>
-            <a:endParaRPr lang="fr-FR"/>
-          </a:p>
-        </p:txBody>
-      </p:sp>
-    </p:spTree>
-    <p:extLst>
-      <p:ext uri="{BB962C8B-B14F-4D97-AF65-F5344CB8AC3E}">
-        <p14:creationId xmlns:p14="http://schemas.microsoft.com/office/powerpoint/2010/main" val="3868805354"/>
-      </p:ext>
-    </p:extLst>
-  </p:cSld>
-  <p:clrMapOvr>
-    <a:masterClrMapping/>
-  </p:clrMapOvr>
-  <p:timing>
-    <p:tnLst>
-      <p:par>
-        <p:cTn id="1" dur="indefinite" restart="never" nodeType="tmRoot">
-          <p:childTnLst>
-            <p:seq concurrent="1" nextAc="seek">
-              <p:cTn id="2" dur="indefinite" nodeType="mainSeq">
-                <p:childTnLst>
-                  <p:par>
-                    <p:cTn id="3" fill="hold">
-                      <p:stCondLst>
-                        <p:cond delay="indefinite"/>
-                        <p:cond evt="onBegin" delay="0">
-                          <p:tn val="2"/>
-                        </p:cond>
-                      </p:stCondLst>
-                      <p:childTnLst>
-                        <p:par>
-                          <p:cTn id="4" fill="hold">
-                            <p:stCondLst>
-                              <p:cond delay="0"/>
-                            </p:stCondLst>
-                            <p:childTnLst>
-                              <p:par>
-                                <p:cTn id="5" presetID="10" presetClass="entr" presetSubtype="0" fill="hold" grpId="0" nodeType="afterEffect">
-                                  <p:stCondLst>
-                                    <p:cond delay="0"/>
-                                  </p:stCondLst>
-                                  <p:childTnLst>
-                                    <p:set>
-                                      <p:cBhvr>
-                                        <p:cTn id="6" dur="1" fill="hold">
-                                          <p:stCondLst>
-                                            <p:cond delay="0"/>
-                                          </p:stCondLst>
-                                        </p:cTn>
-                                        <p:tgtEl>
-                                          <p:spTgt spid="2"/>
-                                        </p:tgtEl>
-                                        <p:attrNameLst>
-                                          <p:attrName>style.visibility</p:attrName>
-                                        </p:attrNameLst>
-                                      </p:cBhvr>
-                                      <p:to>
-                                        <p:strVal val="visible"/>
-                                      </p:to>
-                                    </p:set>
-                                    <p:animEffect transition="in" filter="fade">
-                                      <p:cBhvr>
-                                        <p:cTn id="7" dur="500"/>
-                                        <p:tgtEl>
-                                          <p:spTgt spid="2"/>
-                                        </p:tgtEl>
-                                      </p:cBhvr>
-                                    </p:animEffect>
-                                  </p:childTnLst>
-                                </p:cTn>
-                              </p:par>
-                            </p:childTnLst>
-                          </p:cTn>
-                        </p:par>
-                      </p:childTnLst>
-                    </p:cTn>
-                  </p:par>
-                </p:childTnLst>
-              </p:cTn>
-              <p:prevCondLst>
-                <p:cond evt="onPrev" delay="0">
-                  <p:tgtEl>
-                    <p:sldTgt/>
-                  </p:tgtEl>
-                </p:cond>
-              </p:prevCondLst>
-              <p:nextCondLst>
-                <p:cond evt="onNext" delay="0">
-                  <p:tgtEl>
-                    <p:sldTgt/>
-                  </p:tgtEl>
-                </p:cond>
-              </p:nextCondLst>
-            </p:seq>
-          </p:childTnLst>
-        </p:cTn>
-      </p:par>
-    </p:tnLst>
-    <p:bldLst>
-      <p:bldP spid="2" grpId="0" animBg="1"/>
-    </p:bldLst>
-  </p:timing>
 </p:sld>
 </file>
 
@@ -18325,6 +18438,248 @@
           <a:chExt cx="0" cy="0"/>
         </a:xfrm>
       </p:grpSpPr>
+      <p:pic>
+        <p:nvPicPr>
+          <p:cNvPr id="4105" name="Picture 8" descr="INI_section3.jpg"/>
+          <p:cNvPicPr>
+            <a:picLocks noChangeAspect="1"/>
+          </p:cNvPicPr>
+          <p:nvPr/>
+        </p:nvPicPr>
+        <p:blipFill>
+          <a:blip r:embed="rId3"/>
+          <a:stretch>
+            <a:fillRect/>
+          </a:stretch>
+        </p:blipFill>
+        <p:spPr>
+          <a:xfrm>
+            <a:off x="0" y="0"/>
+            <a:ext cx="12192000" cy="6858000"/>
+          </a:xfrm>
+          <a:prstGeom prst="rect">
+            <a:avLst/>
+          </a:prstGeom>
+        </p:spPr>
+      </p:pic>
+      <p:sp>
+        <p:nvSpPr>
+          <p:cNvPr id="2" name="ZoneTexte 1">
+            <a:extLst>
+              <a:ext uri="{FF2B5EF4-FFF2-40B4-BE49-F238E27FC236}">
+                <a16:creationId xmlns:a16="http://schemas.microsoft.com/office/drawing/2014/main" id="{E73067B4-4758-7D90-FE25-49374D623451}"/>
+              </a:ext>
+            </a:extLst>
+          </p:cNvPr>
+          <p:cNvSpPr txBox="1"/>
+          <p:nvPr/>
+        </p:nvSpPr>
+        <p:spPr>
+          <a:xfrm>
+            <a:off x="838200" y="946800"/>
+            <a:ext cx="6129893" cy="1105200"/>
+          </a:xfrm>
+          <a:prstGeom prst="rect">
+            <a:avLst/>
+          </a:prstGeom>
+          <a:solidFill>
+            <a:schemeClr val="bg2">
+              <a:lumMod val="50000"/>
+              <a:alpha val="74902"/>
+            </a:schemeClr>
+          </a:solidFill>
+          <a:effectLst>
+            <a:outerShdw blurRad="50800" dist="38100" dir="2700000" algn="tl" rotWithShape="0">
+              <a:prstClr val="black">
+                <a:alpha val="40000"/>
+              </a:prstClr>
+            </a:outerShdw>
+          </a:effectLst>
+        </p:spPr>
+        <p:txBody>
+          <a:bodyPr wrap="square" rtlCol="0">
+            <a:spAutoFit/>
+          </a:bodyPr>
+          <a:lstStyle/>
+          <a:p>
+            <a:r>
+              <a:rPr lang="fr-FR" sz="6600" b="1" dirty="0">
+                <a:ln w="0"/>
+                <a:effectLst>
+                  <a:outerShdw blurRad="38100" dist="19050" dir="2700000" algn="tl" rotWithShape="0">
+                    <a:schemeClr val="dk1">
+                      <a:alpha val="40000"/>
+                    </a:schemeClr>
+                  </a:outerShdw>
+                </a:effectLst>
+                <a:latin typeface="Calibri"/>
+                <a:cs typeface="Calibri"/>
+              </a:rPr>
+              <a:t>3. Les mémentos</a:t>
+            </a:r>
+            <a:endParaRPr lang="fr-FR" b="1" dirty="0">
+              <a:ln w="0"/>
+              <a:effectLst>
+                <a:outerShdw blurRad="38100" dist="19050" dir="2700000" algn="tl" rotWithShape="0">
+                  <a:schemeClr val="dk1">
+                    <a:alpha val="40000"/>
+                  </a:schemeClr>
+                </a:outerShdw>
+              </a:effectLst>
+              <a:latin typeface="Calibri" panose="020F0502020204030204" pitchFamily="34" charset="0"/>
+              <a:cs typeface="Calibri" panose="020F0502020204030204" pitchFamily="34" charset="0"/>
+            </a:endParaRPr>
+          </a:p>
+        </p:txBody>
+      </p:sp>
+      <p:sp>
+        <p:nvSpPr>
+          <p:cNvPr id="3" name="Espace réservé du numéro de diapositive 2">
+            <a:extLst>
+              <a:ext uri="{FF2B5EF4-FFF2-40B4-BE49-F238E27FC236}">
+                <a16:creationId xmlns:a16="http://schemas.microsoft.com/office/drawing/2014/main" id="{3918A127-4A9F-4E38-ECD2-0153C0A2B766}"/>
+              </a:ext>
+            </a:extLst>
+          </p:cNvPr>
+          <p:cNvSpPr>
+            <a:spLocks noGrp="1"/>
+          </p:cNvSpPr>
+          <p:nvPr>
+            <p:ph type="sldNum" sz="quarter" idx="4"/>
+          </p:nvPr>
+        </p:nvSpPr>
+        <p:spPr/>
+        <p:txBody>
+          <a:bodyPr/>
+          <a:lstStyle/>
+          <a:p>
+            <a:fld id="{33C783E2-4793-4F48-A271-51A73CC37D74}" type="slidenum">
+              <a:rPr lang="fr-FR" smtClean="0"/>
+              <a:t>20</a:t>
+            </a:fld>
+            <a:endParaRPr lang="fr-FR"/>
+          </a:p>
+        </p:txBody>
+      </p:sp>
+    </p:spTree>
+    <p:extLst>
+      <p:ext uri="{BB962C8B-B14F-4D97-AF65-F5344CB8AC3E}">
+        <p14:creationId xmlns:p14="http://schemas.microsoft.com/office/powerpoint/2010/main" val="3868805354"/>
+      </p:ext>
+    </p:extLst>
+  </p:cSld>
+  <p:clrMapOvr>
+    <a:masterClrMapping/>
+  </p:clrMapOvr>
+  <p:timing>
+    <p:tnLst>
+      <p:par>
+        <p:cTn id="1" dur="indefinite" restart="never" nodeType="tmRoot">
+          <p:childTnLst>
+            <p:seq concurrent="1" nextAc="seek">
+              <p:cTn id="2" dur="indefinite" nodeType="mainSeq">
+                <p:childTnLst>
+                  <p:par>
+                    <p:cTn id="3" fill="hold">
+                      <p:stCondLst>
+                        <p:cond delay="indefinite"/>
+                        <p:cond evt="onBegin" delay="0">
+                          <p:tn val="2"/>
+                        </p:cond>
+                      </p:stCondLst>
+                      <p:childTnLst>
+                        <p:par>
+                          <p:cTn id="4" fill="hold">
+                            <p:stCondLst>
+                              <p:cond delay="0"/>
+                            </p:stCondLst>
+                            <p:childTnLst>
+                              <p:par>
+                                <p:cTn id="5" presetID="10" presetClass="entr" presetSubtype="0" fill="hold" grpId="0" nodeType="afterEffect">
+                                  <p:stCondLst>
+                                    <p:cond delay="0"/>
+                                  </p:stCondLst>
+                                  <p:childTnLst>
+                                    <p:set>
+                                      <p:cBhvr>
+                                        <p:cTn id="6" dur="1" fill="hold">
+                                          <p:stCondLst>
+                                            <p:cond delay="0"/>
+                                          </p:stCondLst>
+                                        </p:cTn>
+                                        <p:tgtEl>
+                                          <p:spTgt spid="2"/>
+                                        </p:tgtEl>
+                                        <p:attrNameLst>
+                                          <p:attrName>style.visibility</p:attrName>
+                                        </p:attrNameLst>
+                                      </p:cBhvr>
+                                      <p:to>
+                                        <p:strVal val="visible"/>
+                                      </p:to>
+                                    </p:set>
+                                    <p:animEffect transition="in" filter="fade">
+                                      <p:cBhvr>
+                                        <p:cTn id="7" dur="500"/>
+                                        <p:tgtEl>
+                                          <p:spTgt spid="2"/>
+                                        </p:tgtEl>
+                                      </p:cBhvr>
+                                    </p:animEffect>
+                                  </p:childTnLst>
+                                </p:cTn>
+                              </p:par>
+                            </p:childTnLst>
+                          </p:cTn>
+                        </p:par>
+                      </p:childTnLst>
+                    </p:cTn>
+                  </p:par>
+                </p:childTnLst>
+              </p:cTn>
+              <p:prevCondLst>
+                <p:cond evt="onPrev" delay="0">
+                  <p:tgtEl>
+                    <p:sldTgt/>
+                  </p:tgtEl>
+                </p:cond>
+              </p:prevCondLst>
+              <p:nextCondLst>
+                <p:cond evt="onNext" delay="0">
+                  <p:tgtEl>
+                    <p:sldTgt/>
+                  </p:tgtEl>
+                </p:cond>
+              </p:nextCondLst>
+            </p:seq>
+          </p:childTnLst>
+        </p:cTn>
+      </p:par>
+    </p:tnLst>
+    <p:bldLst>
+      <p:bldP spid="2" grpId="0" animBg="1"/>
+    </p:bldLst>
+  </p:timing>
+</p:sld>
+</file>
+
+<file path=ppt/slides/slide21.xml><?xml version="1.0" encoding="utf-8"?>
+<p:sld xmlns:a="http://schemas.openxmlformats.org/drawingml/2006/main" xmlns:r="http://schemas.openxmlformats.org/officeDocument/2006/relationships" xmlns:p="http://schemas.openxmlformats.org/presentationml/2006/main">
+  <p:cSld>
+    <p:spTree>
+      <p:nvGrpSpPr>
+        <p:cNvPr id="1" name=""/>
+        <p:cNvGrpSpPr/>
+        <p:nvPr/>
+      </p:nvGrpSpPr>
+      <p:grpSpPr>
+        <a:xfrm>
+          <a:off x="0" y="0"/>
+          <a:ext cx="0" cy="0"/>
+          <a:chOff x="0" y="0"/>
+          <a:chExt cx="0" cy="0"/>
+        </a:xfrm>
+      </p:grpSpPr>
       <p:sp>
         <p:nvSpPr>
           <p:cNvPr id="2" name="Title 1"/>
@@ -18372,7 +18727,7 @@
           <a:p>
             <a:fld id="{33C783E2-4793-4F48-A271-51A73CC37D74}" type="slidenum">
               <a:rPr lang="fr-FR" smtClean="0"/>
-              <a:t>20</a:t>
+              <a:t>21</a:t>
             </a:fld>
             <a:endParaRPr lang="fr-FR"/>
           </a:p>
@@ -19493,7 +19848,7 @@
 </p:sld>
 </file>
 
-<file path=ppt/slides/slide21.xml><?xml version="1.0" encoding="utf-8"?>
+<file path=ppt/slides/slide22.xml><?xml version="1.0" encoding="utf-8"?>
 <p:sld xmlns:a="http://schemas.openxmlformats.org/drawingml/2006/main" xmlns:r="http://schemas.openxmlformats.org/officeDocument/2006/relationships" xmlns:p="http://schemas.openxmlformats.org/presentationml/2006/main">
   <p:cSld>
     <p:spTree>
@@ -19713,7 +20068,7 @@
           <a:p>
             <a:fld id="{33C783E2-4793-4F48-A271-51A73CC37D74}" type="slidenum">
               <a:rPr lang="fr-FR" smtClean="0"/>
-              <a:t>21</a:t>
+              <a:t>22</a:t>
             </a:fld>
             <a:endParaRPr lang="fr-FR"/>
           </a:p>
@@ -20020,279 +20375,6 @@
 </p:sld>
 </file>
 
-<file path=ppt/slides/slide22.xml><?xml version="1.0" encoding="utf-8"?>
-<p:sld xmlns:a="http://schemas.openxmlformats.org/drawingml/2006/main" xmlns:r="http://schemas.openxmlformats.org/officeDocument/2006/relationships" xmlns:p="http://schemas.openxmlformats.org/presentationml/2006/main">
-  <p:cSld>
-    <p:spTree>
-      <p:nvGrpSpPr>
-        <p:cNvPr id="1" name=""/>
-        <p:cNvGrpSpPr/>
-        <p:nvPr/>
-      </p:nvGrpSpPr>
-      <p:grpSpPr>
-        <a:xfrm>
-          <a:off x="0" y="0"/>
-          <a:ext cx="0" cy="0"/>
-          <a:chOff x="0" y="0"/>
-          <a:chExt cx="0" cy="0"/>
-        </a:xfrm>
-      </p:grpSpPr>
-      <p:sp>
-        <p:nvSpPr>
-          <p:cNvPr id="2" name="Title 1"/>
-          <p:cNvSpPr>
-            <a:spLocks noGrp="1"/>
-          </p:cNvSpPr>
-          <p:nvPr>
-            <p:ph type="title"/>
-          </p:nvPr>
-        </p:nvSpPr>
-        <p:spPr/>
-        <p:txBody>
-          <a:bodyPr>
-            <a:noAutofit/>
-          </a:bodyPr>
-          <a:lstStyle/>
-          <a:p>
-            <a:r>
-              <a:rPr sz="4000"/>
-              <a:t>Le guide IntelliJ</a:t>
-            </a:r>
-          </a:p>
-        </p:txBody>
-      </p:sp>
-      <p:sp>
-        <p:nvSpPr>
-          <p:cNvPr id="3" name="Content Placeholder 2"/>
-          <p:cNvSpPr>
-            <a:spLocks noGrp="1"/>
-          </p:cNvSpPr>
-          <p:nvPr>
-            <p:ph idx="1"/>
-          </p:nvPr>
-        </p:nvSpPr>
-        <p:spPr>
-          <a:xfrm>
-            <a:off x="640080" y="1371600"/>
-            <a:ext cx="10881360" cy="4800600"/>
-          </a:xfrm>
-        </p:spPr>
-        <p:txBody>
-          <a:bodyPr/>
-          <a:lstStyle/>
-          <a:p>
-            <a:pPr marL="0" indent="0">
-              <a:spcAft>
-                <a:spcPts val="800"/>
-              </a:spcAft>
-              <a:buNone/>
-            </a:pPr>
-            <a:r>
-              <a:rPr lang="nl-BE" sz="2800" dirty="0"/>
-              <a:t>Ce guide couvre l'utilisation d'IntelliJ</a:t>
-            </a:r>
-          </a:p>
-          <a:p>
-            <a:pPr marL="0" indent="0">
-              <a:spcAft>
-                <a:spcPts val="800"/>
-              </a:spcAft>
-              <a:buNone/>
-            </a:pPr>
-            <a:r>
-              <a:rPr sz="2800" dirty="0"/>
-              <a:t>Les sections </a:t>
-            </a:r>
-            <a:r>
-              <a:rPr sz="2800" dirty="0">
-                <a:solidFill>
-                  <a:schemeClr val="accent4"/>
-                </a:solidFill>
-                <a:latin typeface="Consolas"/>
-              </a:rPr>
-              <a:t>IDE</a:t>
-            </a:r>
-            <a:r>
-              <a:rPr sz="2800" dirty="0"/>
-              <a:t> : installer, </a:t>
-            </a:r>
-            <a:r>
-              <a:rPr sz="2800" dirty="0" err="1"/>
-              <a:t>créer</a:t>
-            </a:r>
-            <a:r>
-              <a:rPr sz="2800" dirty="0"/>
-              <a:t>, </a:t>
-            </a:r>
-            <a:r>
-              <a:rPr sz="2800" dirty="0" err="1"/>
-              <a:t>exécuter</a:t>
-            </a:r>
-            <a:r>
-              <a:rPr sz="2800" dirty="0"/>
-              <a:t>, </a:t>
-            </a:r>
-            <a:r>
-              <a:rPr sz="2800" dirty="0" err="1"/>
-              <a:t>déboguer</a:t>
-            </a:r>
-            <a:endParaRPr sz="2800" dirty="0"/>
-          </a:p>
-          <a:p>
-            <a:pPr marL="0" indent="0">
-              <a:spcAft>
-                <a:spcPts val="800"/>
-              </a:spcAft>
-              <a:buNone/>
-            </a:pPr>
-            <a:r>
-              <a:rPr sz="2800" dirty="0"/>
-              <a:t>Les entrées </a:t>
-            </a:r>
-            <a:r>
-              <a:rPr sz="2800" dirty="0">
-                <a:solidFill>
-                  <a:schemeClr val="accent4"/>
-                </a:solidFill>
-                <a:latin typeface="Consolas"/>
-              </a:rPr>
-              <a:t>ERR</a:t>
-            </a:r>
-            <a:r>
-              <a:rPr sz="2800" dirty="0"/>
-              <a:t> : les messages d</a:t>
-            </a:r>
-            <a:r>
-              <a:rPr lang="fr-BE" sz="2800" dirty="0"/>
-              <a:t>'</a:t>
-            </a:r>
-            <a:r>
-              <a:rPr sz="2800" dirty="0" err="1"/>
-              <a:t>erreur</a:t>
-            </a:r>
-            <a:r>
-              <a:rPr sz="2800" dirty="0"/>
-              <a:t> </a:t>
-            </a:r>
-            <a:r>
-              <a:rPr sz="2800" dirty="0" err="1"/>
-              <a:t>fréquents</a:t>
-            </a:r>
-            <a:endParaRPr sz="2800" dirty="0"/>
-          </a:p>
-          <a:p>
-            <a:pPr marL="0" indent="0">
-              <a:spcAft>
-                <a:spcPts val="800"/>
-              </a:spcAft>
-              <a:buNone/>
-            </a:pPr>
-            <a:r>
-              <a:rPr sz="2800" dirty="0"/>
-              <a:t>Des captures d</a:t>
-            </a:r>
-            <a:r>
-              <a:rPr lang="fr-BE" sz="2800" dirty="0"/>
-              <a:t>'</a:t>
-            </a:r>
-            <a:r>
-              <a:rPr sz="2800" dirty="0" err="1"/>
-              <a:t>écran</a:t>
-            </a:r>
-            <a:r>
-              <a:rPr sz="2800" dirty="0"/>
-              <a:t> à </a:t>
-            </a:r>
-            <a:r>
-              <a:rPr sz="2800" dirty="0" err="1"/>
-              <a:t>chaque</a:t>
-            </a:r>
-            <a:r>
-              <a:rPr sz="2800" dirty="0"/>
-              <a:t> étape</a:t>
-            </a:r>
-          </a:p>
-        </p:txBody>
-      </p:sp>
-      <p:sp>
-        <p:nvSpPr>
-          <p:cNvPr id="4" name="Espace réservé du numéro de diapositive 3">
-            <a:extLst>
-              <a:ext uri="{FF2B5EF4-FFF2-40B4-BE49-F238E27FC236}">
-                <a16:creationId xmlns:a16="http://schemas.microsoft.com/office/drawing/2014/main" id="{54F663AF-B9DD-50FD-43D6-172C828163B5}"/>
-              </a:ext>
-            </a:extLst>
-          </p:cNvPr>
-          <p:cNvSpPr>
-            <a:spLocks noGrp="1"/>
-          </p:cNvSpPr>
-          <p:nvPr>
-            <p:ph type="sldNum" sz="quarter" idx="4"/>
-          </p:nvPr>
-        </p:nvSpPr>
-        <p:spPr/>
-        <p:txBody>
-          <a:bodyPr/>
-          <a:lstStyle/>
-          <a:p>
-            <a:fld id="{33C783E2-4793-4F48-A271-51A73CC37D74}" type="slidenum">
-              <a:rPr lang="fr-FR" smtClean="0"/>
-              <a:t>22</a:t>
-            </a:fld>
-            <a:endParaRPr lang="fr-FR"/>
-          </a:p>
-        </p:txBody>
-      </p:sp>
-      <p:sp>
-        <p:nvSpPr>
-          <p:cNvPr id="5" name="Repere de section"/>
-          <p:cNvSpPr txBox="1"/>
-          <p:nvPr/>
-        </p:nvSpPr>
-        <p:spPr>
-          <a:xfrm>
-            <a:off x="6583680" y="6382512"/>
-            <a:ext cx="4480560" cy="320040"/>
-          </a:xfrm>
-          <a:prstGeom prst="rect">
-            <a:avLst/>
-          </a:prstGeom>
-          <a:noFill/>
-        </p:spPr>
-        <p:txBody>
-          <a:bodyPr wrap="none" tIns="0" bIns="0">
-            <a:spAutoFit/>
-          </a:bodyPr>
-          <a:lstStyle/>
-          <a:p>
-            <a:pPr algn="r"/>
-            <a:r>
-              <a:rPr sz="1100">
-                <a:solidFill>
-                  <a:srgbClr val="BCBEC4"/>
-                </a:solidFill>
-              </a:rPr>
-              <a:t>INI · </a:t>
-            </a:r>
-            <a:r>
-              <a:rPr sz="1100" b="1">
-                <a:solidFill>
-                  <a:schemeClr val="accent4"/>
-                </a:solidFill>
-              </a:rPr>
-              <a:t>3. Les mémentos</a:t>
-            </a:r>
-          </a:p>
-        </p:txBody>
-      </p:sp>
-    </p:spTree>
-  </p:cSld>
-  <p:clrMapOvr>
-    <a:masterClrMapping/>
-  </p:clrMapOvr>
-</p:sld>
-</file>
-
 <file path=ppt/slides/slide23.xml><?xml version="1.0" encoding="utf-8"?>
 <p:sld xmlns:a="http://schemas.openxmlformats.org/drawingml/2006/main" xmlns:r="http://schemas.openxmlformats.org/officeDocument/2006/relationships" xmlns:p="http://schemas.openxmlformats.org/presentationml/2006/main">
   <p:cSld>
@@ -20329,7 +20411,7 @@
           <a:p>
             <a:r>
               <a:rPr sz="4000"/>
-              <a:t>Le mémento technique</a:t>
+              <a:t>Le guide IntelliJ</a:t>
             </a:r>
           </a:p>
         </p:txBody>
@@ -20362,7 +20444,7 @@
             </a:pPr>
             <a:r>
               <a:rPr lang="nl-BE" sz="2800" dirty="0"/>
-              <a:t>Le mémento technique explique ce qu'IntelliJ fait pour vous…</a:t>
+              <a:t>Ce guide couvre l'utilisation d'IntelliJ</a:t>
             </a:r>
           </a:p>
           <a:p>
@@ -20374,16 +20456,42 @@
             </a:pPr>
             <a:r>
               <a:rPr sz="2800" dirty="0"/>
-              <a:t>La </a:t>
+              <a:t>Les sections </a:t>
+            </a:r>
+            <a:r>
+              <a:rPr sz="2800" dirty="0">
+                <a:solidFill>
+                  <a:schemeClr val="accent4"/>
+                </a:solidFill>
+                <a:latin typeface="Consolas"/>
+              </a:rPr>
+              <a:t>IDE</a:t>
+            </a:r>
+            <a:r>
+              <a:rPr sz="2800" dirty="0"/>
+              <a:t> : installer, </a:t>
             </a:r>
             <a:r>
               <a:rPr sz="2800" dirty="0" err="1"/>
-              <a:t>plateforme</a:t>
+              <a:t>créer</a:t>
             </a:r>
             <a:r>
               <a:rPr sz="2800" dirty="0"/>
-              <a:t> Java : JVM, JRE, JDK</a:t>
-            </a:r>
+              <a:t>, </a:t>
+            </a:r>
+            <a:r>
+              <a:rPr sz="2800" dirty="0" err="1"/>
+              <a:t>exécuter</a:t>
+            </a:r>
+            <a:r>
+              <a:rPr sz="2800" dirty="0"/>
+              <a:t>, </a:t>
+            </a:r>
+            <a:r>
+              <a:rPr sz="2800" dirty="0" err="1"/>
+              <a:t>déboguer</a:t>
+            </a:r>
+            <a:endParaRPr sz="2800" dirty="0"/>
           </a:p>
           <a:p>
             <a:pPr marL="0" indent="0">
@@ -20394,19 +20502,36 @@
             </a:pPr>
             <a:r>
               <a:rPr sz="2800" dirty="0"/>
-              <a:t>Du code source au </a:t>
+              <a:t>Les entrées </a:t>
+            </a:r>
+            <a:r>
+              <a:rPr sz="2800" dirty="0">
+                <a:solidFill>
+                  <a:schemeClr val="accent4"/>
+                </a:solidFill>
+                <a:latin typeface="Consolas"/>
+              </a:rPr>
+              <a:t>ERR</a:t>
+            </a:r>
+            <a:r>
+              <a:rPr sz="2800" dirty="0"/>
+              <a:t> : les messages d</a:t>
+            </a:r>
+            <a:r>
+              <a:rPr lang="fr-BE" sz="2800" dirty="0"/>
+              <a:t>'</a:t>
             </a:r>
             <a:r>
               <a:rPr sz="2800" dirty="0" err="1"/>
-              <a:t>programme</a:t>
+              <a:t>erreur</a:t>
             </a:r>
             <a:r>
               <a:rPr sz="2800" dirty="0"/>
-              <a:t> : compilation, </a:t>
+              <a:t> </a:t>
             </a:r>
             <a:r>
               <a:rPr sz="2800" dirty="0" err="1"/>
-              <a:t>exécution</a:t>
+              <a:t>fréquents</a:t>
             </a:r>
             <a:endParaRPr sz="2800" dirty="0"/>
           </a:p>
@@ -20419,28 +20544,27 @@
             </a:pPr>
             <a:r>
               <a:rPr sz="2800" dirty="0"/>
-              <a:t>Les </a:t>
+              <a:t>Des captures d</a:t>
+            </a:r>
+            <a:r>
+              <a:rPr lang="fr-BE" sz="2800" dirty="0"/>
+              <a:t>'</a:t>
             </a:r>
             <a:r>
               <a:rPr sz="2800" dirty="0" err="1"/>
-              <a:t>outils</a:t>
+              <a:t>écran</a:t>
             </a:r>
             <a:r>
               <a:rPr sz="2800" dirty="0"/>
-              <a:t> : Maven, </a:t>
-            </a:r>
-            <a:r>
-              <a:rPr sz="2800" dirty="0">
-                <a:solidFill>
-                  <a:schemeClr val="accent4"/>
-                </a:solidFill>
-                <a:latin typeface="Consolas"/>
-              </a:rPr>
-              <a:t>JavaFX</a:t>
+              <a:t> à </a:t>
+            </a:r>
+            <a:r>
+              <a:rPr sz="2800" dirty="0" err="1"/>
+              <a:t>chaque</a:t>
             </a:r>
             <a:r>
               <a:rPr sz="2800" dirty="0"/>
-              <a:t>, Git, archives zip</a:t>
+              <a:t> étape</a:t>
             </a:r>
           </a:p>
         </p:txBody>
@@ -20469,6 +20593,237 @@
             <a:fld id="{33C783E2-4793-4F48-A271-51A73CC37D74}" type="slidenum">
               <a:rPr lang="fr-FR" smtClean="0"/>
               <a:t>23</a:t>
+            </a:fld>
+            <a:endParaRPr lang="fr-FR"/>
+          </a:p>
+        </p:txBody>
+      </p:sp>
+      <p:sp>
+        <p:nvSpPr>
+          <p:cNvPr id="5" name="Repere de section"/>
+          <p:cNvSpPr txBox="1"/>
+          <p:nvPr/>
+        </p:nvSpPr>
+        <p:spPr>
+          <a:xfrm>
+            <a:off x="6583680" y="6382512"/>
+            <a:ext cx="4480560" cy="320040"/>
+          </a:xfrm>
+          <a:prstGeom prst="rect">
+            <a:avLst/>
+          </a:prstGeom>
+          <a:noFill/>
+        </p:spPr>
+        <p:txBody>
+          <a:bodyPr wrap="none" tIns="0" bIns="0">
+            <a:spAutoFit/>
+          </a:bodyPr>
+          <a:lstStyle/>
+          <a:p>
+            <a:pPr algn="r"/>
+            <a:r>
+              <a:rPr sz="1100">
+                <a:solidFill>
+                  <a:srgbClr val="BCBEC4"/>
+                </a:solidFill>
+              </a:rPr>
+              <a:t>INI · </a:t>
+            </a:r>
+            <a:r>
+              <a:rPr sz="1100" b="1">
+                <a:solidFill>
+                  <a:schemeClr val="accent4"/>
+                </a:solidFill>
+              </a:rPr>
+              <a:t>3. Les mémentos</a:t>
+            </a:r>
+          </a:p>
+        </p:txBody>
+      </p:sp>
+    </p:spTree>
+  </p:cSld>
+  <p:clrMapOvr>
+    <a:masterClrMapping/>
+  </p:clrMapOvr>
+</p:sld>
+</file>
+
+<file path=ppt/slides/slide24.xml><?xml version="1.0" encoding="utf-8"?>
+<p:sld xmlns:a="http://schemas.openxmlformats.org/drawingml/2006/main" xmlns:r="http://schemas.openxmlformats.org/officeDocument/2006/relationships" xmlns:p="http://schemas.openxmlformats.org/presentationml/2006/main">
+  <p:cSld>
+    <p:spTree>
+      <p:nvGrpSpPr>
+        <p:cNvPr id="1" name=""/>
+        <p:cNvGrpSpPr/>
+        <p:nvPr/>
+      </p:nvGrpSpPr>
+      <p:grpSpPr>
+        <a:xfrm>
+          <a:off x="0" y="0"/>
+          <a:ext cx="0" cy="0"/>
+          <a:chOff x="0" y="0"/>
+          <a:chExt cx="0" cy="0"/>
+        </a:xfrm>
+      </p:grpSpPr>
+      <p:sp>
+        <p:nvSpPr>
+          <p:cNvPr id="2" name="Title 1"/>
+          <p:cNvSpPr>
+            <a:spLocks noGrp="1"/>
+          </p:cNvSpPr>
+          <p:nvPr>
+            <p:ph type="title"/>
+          </p:nvPr>
+        </p:nvSpPr>
+        <p:spPr/>
+        <p:txBody>
+          <a:bodyPr>
+            <a:noAutofit/>
+          </a:bodyPr>
+          <a:lstStyle/>
+          <a:p>
+            <a:r>
+              <a:rPr sz="4000"/>
+              <a:t>Le mémento technique</a:t>
+            </a:r>
+          </a:p>
+        </p:txBody>
+      </p:sp>
+      <p:sp>
+        <p:nvSpPr>
+          <p:cNvPr id="3" name="Content Placeholder 2"/>
+          <p:cNvSpPr>
+            <a:spLocks noGrp="1"/>
+          </p:cNvSpPr>
+          <p:nvPr>
+            <p:ph idx="1"/>
+          </p:nvPr>
+        </p:nvSpPr>
+        <p:spPr>
+          <a:xfrm>
+            <a:off x="640080" y="1371600"/>
+            <a:ext cx="10881360" cy="4800600"/>
+          </a:xfrm>
+        </p:spPr>
+        <p:txBody>
+          <a:bodyPr/>
+          <a:lstStyle/>
+          <a:p>
+            <a:pPr marL="0" indent="0">
+              <a:spcAft>
+                <a:spcPts val="800"/>
+              </a:spcAft>
+              <a:buNone/>
+            </a:pPr>
+            <a:r>
+              <a:rPr lang="nl-BE" sz="2800" dirty="0"/>
+              <a:t>Le mémento technique explique ce qu'IntelliJ fait pour vous…</a:t>
+            </a:r>
+          </a:p>
+          <a:p>
+            <a:pPr marL="0" indent="0">
+              <a:spcAft>
+                <a:spcPts val="800"/>
+              </a:spcAft>
+              <a:buNone/>
+            </a:pPr>
+            <a:r>
+              <a:rPr sz="2800" dirty="0"/>
+              <a:t>La </a:t>
+            </a:r>
+            <a:r>
+              <a:rPr sz="2800" dirty="0" err="1"/>
+              <a:t>plateforme</a:t>
+            </a:r>
+            <a:r>
+              <a:rPr sz="2800" dirty="0"/>
+              <a:t> Java : JVM, JRE, JDK</a:t>
+            </a:r>
+          </a:p>
+          <a:p>
+            <a:pPr marL="0" indent="0">
+              <a:spcAft>
+                <a:spcPts val="800"/>
+              </a:spcAft>
+              <a:buNone/>
+            </a:pPr>
+            <a:r>
+              <a:rPr sz="2800" dirty="0"/>
+              <a:t>Du code source au </a:t>
+            </a:r>
+            <a:r>
+              <a:rPr sz="2800" dirty="0" err="1"/>
+              <a:t>programme</a:t>
+            </a:r>
+            <a:r>
+              <a:rPr sz="2800" dirty="0"/>
+              <a:t> : compilation, </a:t>
+            </a:r>
+            <a:r>
+              <a:rPr sz="2800" dirty="0" err="1"/>
+              <a:t>exécution</a:t>
+            </a:r>
+            <a:endParaRPr sz="2800" dirty="0"/>
+          </a:p>
+          <a:p>
+            <a:pPr marL="0" indent="0">
+              <a:spcAft>
+                <a:spcPts val="800"/>
+              </a:spcAft>
+              <a:buNone/>
+            </a:pPr>
+            <a:r>
+              <a:rPr sz="2800" dirty="0"/>
+              <a:t>Les </a:t>
+            </a:r>
+            <a:r>
+              <a:rPr sz="2800" dirty="0" err="1"/>
+              <a:t>outils</a:t>
+            </a:r>
+            <a:r>
+              <a:rPr sz="2800" dirty="0"/>
+              <a:t> : Maven, </a:t>
+            </a:r>
+            <a:r>
+              <a:rPr sz="2800" dirty="0">
+                <a:solidFill>
+                  <a:schemeClr val="accent4"/>
+                </a:solidFill>
+                <a:latin typeface="Consolas"/>
+              </a:rPr>
+              <a:t>JavaFX</a:t>
+            </a:r>
+            <a:r>
+              <a:rPr sz="2800" dirty="0"/>
+              <a:t>, Git, archives zip</a:t>
+            </a:r>
+          </a:p>
+        </p:txBody>
+      </p:sp>
+      <p:sp>
+        <p:nvSpPr>
+          <p:cNvPr id="4" name="Espace réservé du numéro de diapositive 3">
+            <a:extLst>
+              <a:ext uri="{FF2B5EF4-FFF2-40B4-BE49-F238E27FC236}">
+                <a16:creationId xmlns:a16="http://schemas.microsoft.com/office/drawing/2014/main" id="{54F663AF-B9DD-50FD-43D6-172C828163B5}"/>
+              </a:ext>
+            </a:extLst>
+          </p:cNvPr>
+          <p:cNvSpPr>
+            <a:spLocks noGrp="1"/>
+          </p:cNvSpPr>
+          <p:nvPr>
+            <p:ph type="sldNum" sz="quarter" idx="4"/>
+          </p:nvPr>
+        </p:nvSpPr>
+        <p:spPr/>
+        <p:txBody>
+          <a:bodyPr/>
+          <a:lstStyle/>
+          <a:p>
+            <a:fld id="{33C783E2-4793-4F48-A271-51A73CC37D74}" type="slidenum">
+              <a:rPr lang="fr-FR" smtClean="0"/>
+              <a:t>24</a:t>
             </a:fld>
             <a:endParaRPr lang="fr-FR"/>
           </a:p>
@@ -20560,7 +20915,7 @@
 </p:sld>
 </file>
 
-<file path=ppt/slides/slide24.xml><?xml version="1.0" encoding="utf-8"?>
+<file path=ppt/slides/slide25.xml><?xml version="1.0" encoding="utf-8"?>
 <p:sld xmlns:a="http://schemas.openxmlformats.org/drawingml/2006/main" xmlns:r="http://schemas.openxmlformats.org/officeDocument/2006/relationships" xmlns:p="http://schemas.openxmlformats.org/presentationml/2006/main">
   <p:cSld>
     <p:spTree>
@@ -20775,7 +21130,7 @@
           <a:p>
             <a:fld id="{33C783E2-4793-4F48-A271-51A73CC37D74}" type="slidenum">
               <a:rPr lang="fr-FR" smtClean="0"/>
-              <a:t>24</a:t>
+              <a:t>25</a:t>
             </a:fld>
             <a:endParaRPr lang="fr-FR"/>
           </a:p>
@@ -21227,7 +21582,7 @@
 </p:sld>
 </file>
 
-<file path=ppt/slides/slide25.xml><?xml version="1.0" encoding="utf-8"?>
+<file path=ppt/slides/slide26.xml><?xml version="1.0" encoding="utf-8"?>
 <p:sld xmlns:a="http://schemas.openxmlformats.org/drawingml/2006/main" xmlns:r="http://schemas.openxmlformats.org/officeDocument/2006/relationships" xmlns:p="http://schemas.openxmlformats.org/presentationml/2006/main">
   <p:cSld>
     <p:spTree>
@@ -21295,7 +21650,7 @@
           <a:p>
             <a:fld id="{33C783E2-4793-4F48-A271-51A73CC37D74}" type="slidenum">
               <a:rPr lang="fr-FR" smtClean="0"/>
-              <a:t>25</a:t>
+              <a:t>26</a:t>
             </a:fld>
             <a:endParaRPr lang="fr-FR"/>
           </a:p>
@@ -21967,205 +22322,6 @@
 </p:sld>
 </file>
 
-<file path=ppt/slides/slide26.xml><?xml version="1.0" encoding="utf-8"?>
-<p:sld xmlns:a="http://schemas.openxmlformats.org/drawingml/2006/main" xmlns:r="http://schemas.openxmlformats.org/officeDocument/2006/relationships" xmlns:p="http://schemas.openxmlformats.org/presentationml/2006/main">
-  <p:cSld>
-    <p:spTree>
-      <p:nvGrpSpPr>
-        <p:cNvPr id="1" name=""/>
-        <p:cNvGrpSpPr/>
-        <p:nvPr/>
-      </p:nvGrpSpPr>
-      <p:grpSpPr>
-        <a:xfrm>
-          <a:off x="0" y="0"/>
-          <a:ext cx="0" cy="0"/>
-          <a:chOff x="0" y="0"/>
-          <a:chExt cx="0" cy="0"/>
-        </a:xfrm>
-      </p:grpSpPr>
-      <p:sp>
-        <p:nvSpPr>
-          <p:cNvPr id="2" name="Title 1"/>
-          <p:cNvSpPr>
-            <a:spLocks noGrp="1"/>
-          </p:cNvSpPr>
-          <p:nvPr>
-            <p:ph type="title"/>
-          </p:nvPr>
-        </p:nvSpPr>
-        <p:spPr/>
-        <p:txBody>
-          <a:bodyPr>
-            <a:noAutofit/>
-          </a:bodyPr>
-          <a:lstStyle/>
-          <a:p>
-            <a:r>
-              <a:rPr sz="4000"/>
-              <a:t>Quelques liens utiles</a:t>
-            </a:r>
-          </a:p>
-        </p:txBody>
-      </p:sp>
-      <p:sp>
-        <p:nvSpPr>
-          <p:cNvPr id="3" name="Content Placeholder 2"/>
-          <p:cNvSpPr>
-            <a:spLocks noGrp="1"/>
-          </p:cNvSpPr>
-          <p:nvPr>
-            <p:ph idx="1"/>
-          </p:nvPr>
-        </p:nvSpPr>
-        <p:spPr>
-          <a:xfrm>
-            <a:off x="640080" y="1371600"/>
-            <a:ext cx="10881360" cy="4800600"/>
-          </a:xfrm>
-        </p:spPr>
-        <p:txBody>
-          <a:bodyPr/>
-          <a:lstStyle/>
-          <a:p>
-            <a:pPr marL="0" indent="0">
-              <a:spcAft>
-                <a:spcPts val="800"/>
-              </a:spcAft>
-              <a:buNone/>
-            </a:pPr>
-            <a:r>
-              <a:rPr sz="2800"/>
-              <a:t>Les versions de Java et leur documentation :</a:t>
-            </a:r>
-          </a:p>
-          <a:p>
-            <a:pPr marL="457200" lvl="1" indent="0">
-              <a:spcAft>
-                <a:spcPts val="800"/>
-              </a:spcAft>
-              <a:buNone/>
-            </a:pPr>
-            <a:r>
-              <a:rPr sz="2800">
-                <a:solidFill>
-                  <a:schemeClr val="accent4"/>
-                </a:solidFill>
-                <a:hlinkClick r:id="rId3"/>
-              </a:rPr>
-              <a:t>docs.oracle.com/en/java/javase/</a:t>
-            </a:r>
-          </a:p>
-          <a:p>
-            <a:pPr marL="0" indent="0">
-              <a:spcAft>
-                <a:spcPts val="800"/>
-              </a:spcAft>
-              <a:buNone/>
-            </a:pPr>
-            <a:r>
-              <a:rPr sz="2800"/>
-              <a:t>Un site en français, très complet :</a:t>
-            </a:r>
-          </a:p>
-          <a:p>
-            <a:pPr marL="457200" lvl="1" indent="0">
-              <a:spcAft>
-                <a:spcPts val="800"/>
-              </a:spcAft>
-              <a:buNone/>
-            </a:pPr>
-            <a:r>
-              <a:rPr sz="2800">
-                <a:solidFill>
-                  <a:schemeClr val="accent4"/>
-                </a:solidFill>
-                <a:hlinkClick r:id="rId4"/>
-              </a:rPr>
-              <a:t>jmdoudoux.fr/java/dej/</a:t>
-            </a:r>
-          </a:p>
-        </p:txBody>
-      </p:sp>
-      <p:sp>
-        <p:nvSpPr>
-          <p:cNvPr id="4" name="Espace réservé du numéro de diapositive 3">
-            <a:extLst>
-              <a:ext uri="{FF2B5EF4-FFF2-40B4-BE49-F238E27FC236}">
-                <a16:creationId xmlns:a16="http://schemas.microsoft.com/office/drawing/2014/main" id="{54F663AF-B9DD-50FD-43D6-172C828163B5}"/>
-              </a:ext>
-            </a:extLst>
-          </p:cNvPr>
-          <p:cNvSpPr>
-            <a:spLocks noGrp="1"/>
-          </p:cNvSpPr>
-          <p:nvPr>
-            <p:ph type="sldNum" sz="quarter" idx="4"/>
-          </p:nvPr>
-        </p:nvSpPr>
-        <p:spPr/>
-        <p:txBody>
-          <a:bodyPr/>
-          <a:lstStyle/>
-          <a:p>
-            <a:fld id="{33C783E2-4793-4F48-A271-51A73CC37D74}" type="slidenum">
-              <a:rPr lang="fr-FR" smtClean="0"/>
-              <a:t>26</a:t>
-            </a:fld>
-            <a:endParaRPr lang="fr-FR"/>
-          </a:p>
-        </p:txBody>
-      </p:sp>
-      <p:sp>
-        <p:nvSpPr>
-          <p:cNvPr id="5" name="Repere de section"/>
-          <p:cNvSpPr txBox="1"/>
-          <p:nvPr/>
-        </p:nvSpPr>
-        <p:spPr>
-          <a:xfrm>
-            <a:off x="6583680" y="6382512"/>
-            <a:ext cx="4480560" cy="320040"/>
-          </a:xfrm>
-          <a:prstGeom prst="rect">
-            <a:avLst/>
-          </a:prstGeom>
-          <a:noFill/>
-        </p:spPr>
-        <p:txBody>
-          <a:bodyPr wrap="none" tIns="0" bIns="0">
-            <a:spAutoFit/>
-          </a:bodyPr>
-          <a:lstStyle/>
-          <a:p>
-            <a:pPr algn="r"/>
-            <a:r>
-              <a:rPr sz="1100">
-                <a:solidFill>
-                  <a:srgbClr val="BCBEC4"/>
-                </a:solidFill>
-              </a:rPr>
-              <a:t>INI · </a:t>
-            </a:r>
-            <a:r>
-              <a:rPr sz="1100" b="1">
-                <a:solidFill>
-                  <a:schemeClr val="accent4"/>
-                </a:solidFill>
-              </a:rPr>
-              <a:t>3. Les mémentos</a:t>
-            </a:r>
-          </a:p>
-        </p:txBody>
-      </p:sp>
-    </p:spTree>
-  </p:cSld>
-  <p:clrMapOvr>
-    <a:masterClrMapping/>
-  </p:clrMapOvr>
-</p:sld>
-</file>
-
 <file path=ppt/slides/slide27.xml><?xml version="1.0" encoding="utf-8"?>
 <p:sld xmlns:a="http://schemas.openxmlformats.org/drawingml/2006/main" xmlns:r="http://schemas.openxmlformats.org/officeDocument/2006/relationships" xmlns:p="http://schemas.openxmlformats.org/presentationml/2006/main">
   <p:cSld>
@@ -22202,7 +22358,7 @@
           <a:p>
             <a:r>
               <a:rPr sz="4000"/>
-              <a:t>En résumé…</a:t>
+              <a:t>Quelques liens utiles</a:t>
             </a:r>
           </a:p>
         </p:txBody>
@@ -22234,22 +22390,26 @@
               <a:buNone/>
             </a:pPr>
             <a:r>
-              <a:rPr sz="2800" dirty="0"/>
-              <a:t>Un module = un </a:t>
-            </a:r>
-            <a:r>
-              <a:rPr sz="2800" dirty="0" err="1"/>
-              <a:t>sujet</a:t>
-            </a:r>
-            <a:r>
-              <a:rPr sz="2800" dirty="0"/>
-              <a:t>, avec son code de trois </a:t>
-            </a:r>
-            <a:r>
-              <a:rPr sz="2800" dirty="0" err="1"/>
-              <a:t>lettres</a:t>
-            </a:r>
-            <a:endParaRPr sz="2800" dirty="0"/>
+              <a:rPr sz="2800"/>
+              <a:t>Les versions de Java et leur documentation :</a:t>
+            </a:r>
+          </a:p>
+          <a:p>
+            <a:pPr marL="457200" lvl="1" indent="0">
+              <a:spcAft>
+                <a:spcPts val="800"/>
+              </a:spcAft>
+              <a:buNone/>
+            </a:pPr>
+            <a:r>
+              <a:rPr sz="2800">
+                <a:solidFill>
+                  <a:schemeClr val="accent4"/>
+                </a:solidFill>
+                <a:hlinkClick r:id="rId3"/>
+              </a:rPr>
+              <a:t>docs.oracle.com/en/java/javase/</a:t>
+            </a:r>
           </a:p>
           <a:p>
             <a:pPr marL="0" indent="0">
@@ -22259,112 +22419,26 @@
               <a:buNone/>
             </a:pPr>
             <a:r>
-              <a:rPr sz="2800" dirty="0"/>
-              <a:t>Slides, </a:t>
-            </a:r>
-            <a:r>
-              <a:rPr sz="2800" dirty="0" err="1"/>
-              <a:t>démonstration</a:t>
-            </a:r>
-            <a:r>
-              <a:rPr sz="2800" dirty="0"/>
-              <a:t>, fascicule</a:t>
-            </a:r>
-            <a:r>
-              <a:rPr lang="nl-BE" sz="2800" dirty="0"/>
-              <a:t> d’exercices</a:t>
-            </a:r>
-            <a:r>
-              <a:rPr sz="2800" dirty="0"/>
-              <a:t>, </a:t>
-            </a:r>
-            <a:r>
-              <a:rPr sz="2800" dirty="0" err="1"/>
-              <a:t>GameHub</a:t>
-            </a:r>
-            <a:endParaRPr sz="2800" dirty="0"/>
-          </a:p>
-          <a:p>
-            <a:pPr marL="0" indent="0">
+              <a:rPr sz="2800"/>
+              <a:t>Un site en français, très complet :</a:t>
+            </a:r>
+          </a:p>
+          <a:p>
+            <a:pPr marL="457200" lvl="1" indent="0">
               <a:spcAft>
                 <a:spcPts val="800"/>
               </a:spcAft>
               <a:buNone/>
             </a:pPr>
             <a:r>
-              <a:rPr sz="2800" dirty="0"/>
-              <a:t>Des tests pour </a:t>
-            </a:r>
-            <a:r>
-              <a:rPr sz="2800" dirty="0" err="1"/>
-              <a:t>vérifier</a:t>
-            </a:r>
-            <a:r>
-              <a:rPr sz="2800" dirty="0"/>
-              <a:t> vous-</a:t>
-            </a:r>
-            <a:r>
-              <a:rPr sz="2800" dirty="0" err="1"/>
-              <a:t>même</a:t>
-            </a:r>
-            <a:r>
-              <a:rPr sz="2800" dirty="0"/>
-              <a:t> </a:t>
-            </a:r>
-            <a:r>
-              <a:rPr sz="2800" dirty="0" err="1"/>
-              <a:t>vos</a:t>
-            </a:r>
-            <a:r>
-              <a:rPr sz="2800" dirty="0"/>
-              <a:t> </a:t>
-            </a:r>
-            <a:r>
-              <a:rPr sz="2800" dirty="0" err="1"/>
-              <a:t>réponses</a:t>
-            </a:r>
-            <a:endParaRPr sz="2800" dirty="0"/>
-          </a:p>
-          <a:p>
-            <a:pPr marL="0" indent="0">
-              <a:spcAft>
-                <a:spcPts val="800"/>
-              </a:spcAft>
-              <a:buNone/>
-            </a:pPr>
-            <a:r>
-              <a:rPr sz="2800" dirty="0"/>
-              <a:t>Des </a:t>
-            </a:r>
-            <a:r>
-              <a:rPr sz="2800" dirty="0" err="1"/>
-              <a:t>mémentos</a:t>
-            </a:r>
-            <a:r>
-              <a:rPr sz="2800" dirty="0"/>
-              <a:t> à </a:t>
-            </a:r>
-            <a:r>
-              <a:rPr sz="2800" dirty="0" err="1"/>
-              <a:t>ouvrir</a:t>
-            </a:r>
-            <a:r>
-              <a:rPr sz="2800" dirty="0"/>
-              <a:t> </a:t>
-            </a:r>
-            <a:r>
-              <a:rPr sz="2800" dirty="0" err="1"/>
-              <a:t>quand</a:t>
-            </a:r>
-            <a:r>
-              <a:rPr sz="2800" dirty="0"/>
-              <a:t> un renvoi vous y </a:t>
-            </a:r>
-            <a:r>
-              <a:rPr sz="2800" dirty="0" err="1"/>
-              <a:t>envoie</a:t>
-            </a:r>
-            <a:endParaRPr sz="2800" dirty="0"/>
+              <a:rPr sz="2800">
+                <a:solidFill>
+                  <a:schemeClr val="accent4"/>
+                </a:solidFill>
+                <a:hlinkClick r:id="rId4"/>
+              </a:rPr>
+              <a:t>jmdoudoux.fr/java/dej/</a:t>
+            </a:r>
           </a:p>
         </p:txBody>
       </p:sp>
@@ -22392,6 +22466,287 @@
             <a:fld id="{33C783E2-4793-4F48-A271-51A73CC37D74}" type="slidenum">
               <a:rPr lang="fr-FR" smtClean="0"/>
               <a:t>27</a:t>
+            </a:fld>
+            <a:endParaRPr lang="fr-FR"/>
+          </a:p>
+        </p:txBody>
+      </p:sp>
+      <p:sp>
+        <p:nvSpPr>
+          <p:cNvPr id="5" name="Repere de section"/>
+          <p:cNvSpPr txBox="1"/>
+          <p:nvPr/>
+        </p:nvSpPr>
+        <p:spPr>
+          <a:xfrm>
+            <a:off x="6583680" y="6382512"/>
+            <a:ext cx="4480560" cy="320040"/>
+          </a:xfrm>
+          <a:prstGeom prst="rect">
+            <a:avLst/>
+          </a:prstGeom>
+          <a:noFill/>
+        </p:spPr>
+        <p:txBody>
+          <a:bodyPr wrap="none" tIns="0" bIns="0">
+            <a:spAutoFit/>
+          </a:bodyPr>
+          <a:lstStyle/>
+          <a:p>
+            <a:pPr algn="r"/>
+            <a:r>
+              <a:rPr sz="1100">
+                <a:solidFill>
+                  <a:srgbClr val="BCBEC4"/>
+                </a:solidFill>
+              </a:rPr>
+              <a:t>INI · </a:t>
+            </a:r>
+            <a:r>
+              <a:rPr sz="1100" b="1">
+                <a:solidFill>
+                  <a:schemeClr val="accent4"/>
+                </a:solidFill>
+              </a:rPr>
+              <a:t>3. Les mémentos</a:t>
+            </a:r>
+          </a:p>
+        </p:txBody>
+      </p:sp>
+    </p:spTree>
+  </p:cSld>
+  <p:clrMapOvr>
+    <a:masterClrMapping/>
+  </p:clrMapOvr>
+</p:sld>
+</file>
+
+<file path=ppt/slides/slide28.xml><?xml version="1.0" encoding="utf-8"?>
+<p:sld xmlns:a="http://schemas.openxmlformats.org/drawingml/2006/main" xmlns:r="http://schemas.openxmlformats.org/officeDocument/2006/relationships" xmlns:p="http://schemas.openxmlformats.org/presentationml/2006/main">
+  <p:cSld>
+    <p:spTree>
+      <p:nvGrpSpPr>
+        <p:cNvPr id="1" name=""/>
+        <p:cNvGrpSpPr/>
+        <p:nvPr/>
+      </p:nvGrpSpPr>
+      <p:grpSpPr>
+        <a:xfrm>
+          <a:off x="0" y="0"/>
+          <a:ext cx="0" cy="0"/>
+          <a:chOff x="0" y="0"/>
+          <a:chExt cx="0" cy="0"/>
+        </a:xfrm>
+      </p:grpSpPr>
+      <p:sp>
+        <p:nvSpPr>
+          <p:cNvPr id="2" name="Title 1"/>
+          <p:cNvSpPr>
+            <a:spLocks noGrp="1"/>
+          </p:cNvSpPr>
+          <p:nvPr>
+            <p:ph type="title"/>
+          </p:nvPr>
+        </p:nvSpPr>
+        <p:spPr/>
+        <p:txBody>
+          <a:bodyPr>
+            <a:noAutofit/>
+          </a:bodyPr>
+          <a:lstStyle/>
+          <a:p>
+            <a:r>
+              <a:rPr sz="4000"/>
+              <a:t>En résumé…</a:t>
+            </a:r>
+          </a:p>
+        </p:txBody>
+      </p:sp>
+      <p:sp>
+        <p:nvSpPr>
+          <p:cNvPr id="3" name="Content Placeholder 2"/>
+          <p:cNvSpPr>
+            <a:spLocks noGrp="1"/>
+          </p:cNvSpPr>
+          <p:nvPr>
+            <p:ph idx="1"/>
+          </p:nvPr>
+        </p:nvSpPr>
+        <p:spPr>
+          <a:xfrm>
+            <a:off x="640080" y="1371600"/>
+            <a:ext cx="10881360" cy="4800600"/>
+          </a:xfrm>
+        </p:spPr>
+        <p:txBody>
+          <a:bodyPr/>
+          <a:lstStyle/>
+          <a:p>
+            <a:pPr marL="0" indent="0">
+              <a:spcAft>
+                <a:spcPts val="800"/>
+              </a:spcAft>
+              <a:buNone/>
+            </a:pPr>
+            <a:r>
+              <a:rPr sz="2800" dirty="0"/>
+              <a:t>Un module = un </a:t>
+            </a:r>
+            <a:r>
+              <a:rPr sz="2800" dirty="0" err="1"/>
+              <a:t>sujet</a:t>
+            </a:r>
+            <a:r>
+              <a:rPr sz="2800" dirty="0"/>
+              <a:t>, avec son code de trois </a:t>
+            </a:r>
+            <a:r>
+              <a:rPr sz="2800" dirty="0" err="1"/>
+              <a:t>lettres</a:t>
+            </a:r>
+            <a:endParaRPr sz="2800" dirty="0"/>
+          </a:p>
+          <a:p>
+            <a:pPr marL="0" indent="0">
+              <a:spcAft>
+                <a:spcPts val="800"/>
+              </a:spcAft>
+              <a:buNone/>
+            </a:pPr>
+            <a:r>
+              <a:rPr sz="2800" dirty="0"/>
+              <a:t>Slides, </a:t>
+            </a:r>
+            <a:r>
+              <a:rPr sz="2800" dirty="0" err="1"/>
+              <a:t>démonstration</a:t>
+            </a:r>
+            <a:r>
+              <a:rPr sz="2800" dirty="0"/>
+              <a:t>, fascicule</a:t>
+            </a:r>
+            <a:r>
+              <a:rPr lang="nl-BE" sz="2800" dirty="0"/>
+              <a:t> d’exercices</a:t>
+            </a:r>
+            <a:r>
+              <a:rPr sz="2800" dirty="0"/>
+              <a:t>, </a:t>
+            </a:r>
+            <a:r>
+              <a:rPr sz="2800" dirty="0" err="1"/>
+              <a:t>GameHub</a:t>
+            </a:r>
+            <a:endParaRPr sz="2800" dirty="0"/>
+          </a:p>
+          <a:p>
+            <a:pPr marL="0" indent="0">
+              <a:spcAft>
+                <a:spcPts val="800"/>
+              </a:spcAft>
+              <a:buNone/>
+            </a:pPr>
+            <a:r>
+              <a:rPr sz="2800" dirty="0"/>
+              <a:t>Des tests pour </a:t>
+            </a:r>
+            <a:r>
+              <a:rPr sz="2800" dirty="0" err="1"/>
+              <a:t>vérifier</a:t>
+            </a:r>
+            <a:r>
+              <a:rPr sz="2800" dirty="0"/>
+              <a:t> vous-</a:t>
+            </a:r>
+            <a:r>
+              <a:rPr sz="2800" dirty="0" err="1"/>
+              <a:t>même</a:t>
+            </a:r>
+            <a:r>
+              <a:rPr sz="2800" dirty="0"/>
+              <a:t> </a:t>
+            </a:r>
+            <a:r>
+              <a:rPr sz="2800" dirty="0" err="1"/>
+              <a:t>vos</a:t>
+            </a:r>
+            <a:r>
+              <a:rPr sz="2800" dirty="0"/>
+              <a:t> </a:t>
+            </a:r>
+            <a:r>
+              <a:rPr sz="2800" dirty="0" err="1"/>
+              <a:t>réponses</a:t>
+            </a:r>
+            <a:endParaRPr sz="2800" dirty="0"/>
+          </a:p>
+          <a:p>
+            <a:pPr marL="0" indent="0">
+              <a:spcAft>
+                <a:spcPts val="800"/>
+              </a:spcAft>
+              <a:buNone/>
+            </a:pPr>
+            <a:r>
+              <a:rPr sz="2800" dirty="0"/>
+              <a:t>Des </a:t>
+            </a:r>
+            <a:r>
+              <a:rPr sz="2800" dirty="0" err="1"/>
+              <a:t>mémentos</a:t>
+            </a:r>
+            <a:r>
+              <a:rPr sz="2800" dirty="0"/>
+              <a:t> à </a:t>
+            </a:r>
+            <a:r>
+              <a:rPr sz="2800" dirty="0" err="1"/>
+              <a:t>ouvrir</a:t>
+            </a:r>
+            <a:r>
+              <a:rPr sz="2800" dirty="0"/>
+              <a:t> </a:t>
+            </a:r>
+            <a:r>
+              <a:rPr sz="2800" dirty="0" err="1"/>
+              <a:t>quand</a:t>
+            </a:r>
+            <a:r>
+              <a:rPr sz="2800" dirty="0"/>
+              <a:t> un renvoi vous y </a:t>
+            </a:r>
+            <a:r>
+              <a:rPr sz="2800" dirty="0" err="1"/>
+              <a:t>envoie</a:t>
+            </a:r>
+            <a:endParaRPr sz="2800" dirty="0"/>
+          </a:p>
+        </p:txBody>
+      </p:sp>
+      <p:sp>
+        <p:nvSpPr>
+          <p:cNvPr id="4" name="Espace réservé du numéro de diapositive 3">
+            <a:extLst>
+              <a:ext uri="{FF2B5EF4-FFF2-40B4-BE49-F238E27FC236}">
+                <a16:creationId xmlns:a16="http://schemas.microsoft.com/office/drawing/2014/main" id="{54F663AF-B9DD-50FD-43D6-172C828163B5}"/>
+              </a:ext>
+            </a:extLst>
+          </p:cNvPr>
+          <p:cNvSpPr>
+            <a:spLocks noGrp="1"/>
+          </p:cNvSpPr>
+          <p:nvPr>
+            <p:ph type="sldNum" sz="quarter" idx="4"/>
+          </p:nvPr>
+        </p:nvSpPr>
+        <p:spPr/>
+        <p:txBody>
+          <a:bodyPr/>
+          <a:lstStyle/>
+          <a:p>
+            <a:fld id="{33C783E2-4793-4F48-A271-51A73CC37D74}" type="slidenum">
+              <a:rPr lang="fr-FR" smtClean="0"/>
+              <a:t>28</a:t>
             </a:fld>
             <a:endParaRPr lang="fr-FR"/>
           </a:p>
